--- a/성격강점 기말 발표.pptx
+++ b/성격강점 기말 발표.pptx
@@ -6,7 +6,7 @@
     <p:sldMasterId id="2147483661" r:id="rId2"/>
   </p:sldMasterIdLst>
   <p:notesMasterIdLst>
-    <p:notesMasterId r:id="rId15"/>
+    <p:notesMasterId r:id="rId17"/>
   </p:notesMasterIdLst>
   <p:sldIdLst>
     <p:sldId id="269" r:id="rId3"/>
@@ -14,13 +14,15 @@
     <p:sldId id="271" r:id="rId5"/>
     <p:sldId id="265" r:id="rId6"/>
     <p:sldId id="272" r:id="rId7"/>
-    <p:sldId id="257" r:id="rId8"/>
-    <p:sldId id="273" r:id="rId9"/>
-    <p:sldId id="256" r:id="rId10"/>
-    <p:sldId id="261" r:id="rId11"/>
-    <p:sldId id="267" r:id="rId12"/>
-    <p:sldId id="266" r:id="rId13"/>
-    <p:sldId id="268" r:id="rId14"/>
+    <p:sldId id="275" r:id="rId8"/>
+    <p:sldId id="274" r:id="rId9"/>
+    <p:sldId id="257" r:id="rId10"/>
+    <p:sldId id="273" r:id="rId11"/>
+    <p:sldId id="256" r:id="rId12"/>
+    <p:sldId id="261" r:id="rId13"/>
+    <p:sldId id="267" r:id="rId14"/>
+    <p:sldId id="266" r:id="rId15"/>
+    <p:sldId id="268" r:id="rId16"/>
   </p:sldIdLst>
   <p:sldSz cx="12192000" cy="6858000"/>
   <p:notesSz cx="6858000" cy="9144000"/>
@@ -209,7 +211,7 @@
           <a:p>
             <a:fld id="{A988E8DE-B44E-4CD5-B139-CED52C9C4A5A}" type="datetimeFigureOut">
               <a:rPr lang="ko-KR" altLang="en-US" smtClean="0"/>
-              <a:t>2026-05-06</a:t>
+              <a:t>2026-05-19</a:t>
             </a:fld>
             <a:endParaRPr lang="ko-KR" altLang="en-US"/>
           </a:p>
@@ -674,7 +676,7 @@
           <a:p>
             <a:r>
               <a:rPr lang="ko-KR" altLang="en-US" dirty="0"/>
-              <a:t>여러분 앞에서 부족한 제가 감히 강의를 한다는 게 죄송스러웠습니다만 제 강점인 용서를 주제로 여러분께 제 생각을 말씀드릴 수 있었던 게 매우 값진 경험이었습니다</a:t>
+              <a:t>먼저 우리는 용서하기 전 침착해질 필요가 있습니다</a:t>
             </a:r>
             <a:r>
               <a:rPr lang="en-US" altLang="ko-KR" dirty="0"/>
@@ -682,15 +684,125 @@
             </a:r>
             <a:r>
               <a:rPr lang="ko-KR" altLang="en-US" dirty="0"/>
-              <a:t>모두 한 학기 동안 고생 많으셨고 귀한 경험을 하게 </a:t>
+              <a:t>분노는 감성의 영역이며 이는 이성적인 사고를 마비시킵니다</a:t>
+            </a:r>
+            <a:r>
+              <a:rPr lang="en-US" altLang="ko-KR" dirty="0"/>
+              <a:t>.</a:t>
+            </a:r>
+          </a:p>
+          <a:p>
+            <a:r>
+              <a:rPr lang="ko-KR" altLang="en-US" dirty="0"/>
+              <a:t>따라서 이성적으로 판단하기 위해 분노를 잠재우고 </a:t>
             </a:r>
             <a:r>
               <a:rPr lang="ko-KR" altLang="en-US" dirty="0" err="1"/>
-              <a:t>해주신</a:t>
+              <a:t>침착해져야</a:t>
             </a:r>
             <a:r>
               <a:rPr lang="ko-KR" altLang="en-US" dirty="0"/>
-              <a:t> 교수님께도 감사의 말씀 드립니다</a:t>
+              <a:t> 합니다</a:t>
+            </a:r>
+            <a:r>
+              <a:rPr lang="en-US" altLang="ko-KR" dirty="0"/>
+              <a:t>.</a:t>
+            </a:r>
+          </a:p>
+          <a:p>
+            <a:r>
+              <a:rPr lang="ko-KR" altLang="en-US" dirty="0"/>
+              <a:t>다음 상대방이 왜 잘못을 저질렀는지 공감을 할 필요가 있습니다</a:t>
+            </a:r>
+            <a:r>
+              <a:rPr lang="en-US" altLang="ko-KR" dirty="0"/>
+              <a:t>. </a:t>
+            </a:r>
+            <a:r>
+              <a:rPr lang="ko-KR" altLang="en-US" dirty="0"/>
+              <a:t>대체 무슨 생각이었길래 이런 잘못을 했을까</a:t>
+            </a:r>
+            <a:r>
+              <a:rPr lang="en-US" altLang="ko-KR" dirty="0"/>
+              <a:t>. </a:t>
+            </a:r>
+            <a:r>
+              <a:rPr lang="ko-KR" altLang="en-US" dirty="0"/>
+              <a:t>나였어도 그런 행동을 취했을까</a:t>
+            </a:r>
+            <a:r>
+              <a:rPr lang="en-US" altLang="ko-KR" dirty="0"/>
+              <a:t>?</a:t>
+            </a:r>
+            <a:r>
+              <a:rPr lang="ko-KR" altLang="en-US" dirty="0"/>
+              <a:t>를 고민합니다</a:t>
+            </a:r>
+            <a:r>
+              <a:rPr lang="en-US" altLang="ko-KR" dirty="0"/>
+              <a:t>.</a:t>
+            </a:r>
+          </a:p>
+          <a:p>
+            <a:r>
+              <a:rPr lang="ko-KR" altLang="en-US" dirty="0"/>
+              <a:t>세번째로는 내가 받은 상처를 마주하는 것입니다</a:t>
+            </a:r>
+            <a:r>
+              <a:rPr lang="en-US" altLang="ko-KR" dirty="0"/>
+              <a:t>. </a:t>
+            </a:r>
+            <a:r>
+              <a:rPr lang="ko-KR" altLang="en-US" dirty="0"/>
+              <a:t>내가 받은 상처에서 도망치는 것이 아니라 받아들이는 과정이 필요합니다</a:t>
+            </a:r>
+            <a:r>
+              <a:rPr lang="en-US" altLang="ko-KR" dirty="0"/>
+              <a:t>. </a:t>
+            </a:r>
+            <a:r>
+              <a:rPr lang="ko-KR" altLang="en-US" dirty="0"/>
+              <a:t>그래야 마음에서 우러나는 용서를 할 수 있습니다</a:t>
+            </a:r>
+            <a:r>
+              <a:rPr lang="en-US" altLang="ko-KR" dirty="0"/>
+              <a:t>. </a:t>
+            </a:r>
+            <a:r>
+              <a:rPr lang="ko-KR" altLang="en-US" dirty="0"/>
+              <a:t>마지막으로 용서 한 후 이 일에 대해서 잊는 것입니다</a:t>
+            </a:r>
+            <a:r>
+              <a:rPr lang="en-US" altLang="ko-KR" dirty="0"/>
+              <a:t>. </a:t>
+            </a:r>
+            <a:r>
+              <a:rPr lang="ko-KR" altLang="en-US" dirty="0"/>
+              <a:t>사과했고 용서 받았으면 이미 끝난 일이니 </a:t>
+            </a:r>
+            <a:r>
+              <a:rPr lang="en-US" altLang="ko-KR" dirty="0"/>
+              <a:t>20</a:t>
+            </a:r>
+            <a:r>
+              <a:rPr lang="ko-KR" altLang="en-US" dirty="0"/>
+              <a:t>년 </a:t>
+            </a:r>
+            <a:r>
+              <a:rPr lang="en-US" altLang="ko-KR" dirty="0"/>
+              <a:t>30</a:t>
+            </a:r>
+            <a:r>
+              <a:rPr lang="ko-KR" altLang="en-US" dirty="0"/>
+              <a:t>년이 지나고도 너 왜 그때 그렇게 했어 라면서 </a:t>
+            </a:r>
+            <a:r>
+              <a:rPr lang="ko-KR" altLang="en-US" dirty="0" err="1"/>
+              <a:t>따지는건</a:t>
+            </a:r>
+            <a:r>
+              <a:rPr lang="ko-KR" altLang="en-US" dirty="0"/>
+              <a:t> 말이 안되죠</a:t>
             </a:r>
             <a:r>
               <a:rPr lang="en-US" altLang="ko-KR" dirty="0"/>
@@ -726,7 +838,7 @@
     </p:spTree>
     <p:extLst>
       <p:ext uri="{BB962C8B-B14F-4D97-AF65-F5344CB8AC3E}">
-        <p14:creationId xmlns:p14="http://schemas.microsoft.com/office/powerpoint/2010/main" val="914417888"/>
+        <p14:creationId xmlns:p14="http://schemas.microsoft.com/office/powerpoint/2010/main" val="1957142138"/>
       </p:ext>
     </p:extLst>
   </p:cSld>
@@ -780,6 +892,54 @@
           <a:bodyPr/>
           <a:lstStyle/>
           <a:p>
+            <a:r>
+              <a:rPr lang="ko-KR" altLang="en-US" dirty="0"/>
+              <a:t>용서는 문제를 해결하기 가장 쉬운 방법입니다</a:t>
+            </a:r>
+            <a:r>
+              <a:rPr lang="en-US" altLang="ko-KR" dirty="0"/>
+              <a:t>. </a:t>
+            </a:r>
+            <a:r>
+              <a:rPr lang="ko-KR" altLang="en-US" dirty="0"/>
+              <a:t>사람과 </a:t>
+            </a:r>
+            <a:r>
+              <a:rPr lang="ko-KR" altLang="en-US" dirty="0" err="1"/>
+              <a:t>사람간의</a:t>
+            </a:r>
+            <a:r>
+              <a:rPr lang="ko-KR" altLang="en-US" dirty="0"/>
+              <a:t> 감정의 골은 쉽게 없어지지 않습니다</a:t>
+            </a:r>
+            <a:r>
+              <a:rPr lang="en-US" altLang="ko-KR" dirty="0"/>
+              <a:t>. </a:t>
+            </a:r>
+            <a:r>
+              <a:rPr lang="ko-KR" altLang="en-US" dirty="0"/>
+              <a:t>제대로 끝마치지 않은 갈등은 언제 어디서 문제를 일으킬지 모릅니다</a:t>
+            </a:r>
+            <a:r>
+              <a:rPr lang="en-US" altLang="ko-KR" dirty="0"/>
+              <a:t>. </a:t>
+            </a:r>
+            <a:r>
+              <a:rPr lang="ko-KR" altLang="en-US" dirty="0"/>
+              <a:t>용서는 갈등을 가장 빠르고 간단하게 해결할 수 있는 첫번째 방법입니다</a:t>
+            </a:r>
+            <a:r>
+              <a:rPr lang="en-US" altLang="ko-KR" dirty="0"/>
+              <a:t>. </a:t>
+            </a:r>
+            <a:r>
+              <a:rPr lang="ko-KR" altLang="en-US" dirty="0"/>
+              <a:t>그러니 여러분 모두 하해와 같은 마음을 지녔으면 좋겠습니다</a:t>
+            </a:r>
+            <a:r>
+              <a:rPr lang="en-US" altLang="ko-KR" dirty="0"/>
+              <a:t>.</a:t>
+            </a:r>
             <a:endParaRPr lang="ko-KR" altLang="en-US" dirty="0"/>
           </a:p>
         </p:txBody>
@@ -802,6 +962,198 @@
             <a:fld id="{D92E1471-B013-43C5-87B9-D1355B3D4CBC}" type="slidenum">
               <a:rPr lang="ko-KR" altLang="en-US" smtClean="0"/>
               <a:t>11</a:t>
+            </a:fld>
+            <a:endParaRPr lang="ko-KR" altLang="en-US"/>
+          </a:p>
+        </p:txBody>
+      </p:sp>
+    </p:spTree>
+    <p:extLst>
+      <p:ext uri="{BB962C8B-B14F-4D97-AF65-F5344CB8AC3E}">
+        <p14:creationId xmlns:p14="http://schemas.microsoft.com/office/powerpoint/2010/main" val="3913929150"/>
+      </p:ext>
+    </p:extLst>
+  </p:cSld>
+  <p:clrMapOvr>
+    <a:masterClrMapping/>
+  </p:clrMapOvr>
+</p:notes>
+</file>
+
+<file path=ppt/notesSlides/notesSlide12.xml><?xml version="1.0" encoding="utf-8"?>
+<p:notes xmlns:a="http://schemas.openxmlformats.org/drawingml/2006/main" xmlns:r="http://schemas.openxmlformats.org/officeDocument/2006/relationships" xmlns:p="http://schemas.openxmlformats.org/presentationml/2006/main">
+  <p:cSld>
+    <p:spTree>
+      <p:nvGrpSpPr>
+        <p:cNvPr id="1" name=""/>
+        <p:cNvGrpSpPr/>
+        <p:nvPr/>
+      </p:nvGrpSpPr>
+      <p:grpSpPr>
+        <a:xfrm>
+          <a:off x="0" y="0"/>
+          <a:ext cx="0" cy="0"/>
+          <a:chOff x="0" y="0"/>
+          <a:chExt cx="0" cy="0"/>
+        </a:xfrm>
+      </p:grpSpPr>
+      <p:sp>
+        <p:nvSpPr>
+          <p:cNvPr id="2" name="슬라이드 이미지 개체 틀 1"/>
+          <p:cNvSpPr>
+            <a:spLocks noGrp="1" noRot="1" noChangeAspect="1"/>
+          </p:cNvSpPr>
+          <p:nvPr>
+            <p:ph type="sldImg"/>
+          </p:nvPr>
+        </p:nvSpPr>
+        <p:spPr/>
+      </p:sp>
+      <p:sp>
+        <p:nvSpPr>
+          <p:cNvPr id="3" name="슬라이드 노트 개체 틀 2"/>
+          <p:cNvSpPr>
+            <a:spLocks noGrp="1"/>
+          </p:cNvSpPr>
+          <p:nvPr>
+            <p:ph type="body" idx="1"/>
+          </p:nvPr>
+        </p:nvSpPr>
+        <p:spPr/>
+        <p:txBody>
+          <a:bodyPr/>
+          <a:lstStyle/>
+          <a:p>
+            <a:r>
+              <a:rPr lang="ko-KR" altLang="en-US" dirty="0"/>
+              <a:t>여러분 앞에서 부족한 제가 감히 강의를 한다는 게 죄송스러웠습니다만 제 강점인 용서를 주제로 여러분께 제 생각을 말씀드릴 수 있었던 게 매우 값진 경험이었습니다</a:t>
+            </a:r>
+            <a:r>
+              <a:rPr lang="en-US" altLang="ko-KR" dirty="0"/>
+              <a:t>. </a:t>
+            </a:r>
+            <a:r>
+              <a:rPr lang="ko-KR" altLang="en-US" dirty="0"/>
+              <a:t>모두 한 학기 동안 고생 많으셨고 귀한 경험을 하게 </a:t>
+            </a:r>
+            <a:r>
+              <a:rPr lang="ko-KR" altLang="en-US" dirty="0" err="1"/>
+              <a:t>해주신</a:t>
+            </a:r>
+            <a:r>
+              <a:rPr lang="ko-KR" altLang="en-US" dirty="0"/>
+              <a:t> 교수님께도 감사의 말씀 드립니다</a:t>
+            </a:r>
+            <a:r>
+              <a:rPr lang="en-US" altLang="ko-KR" dirty="0"/>
+              <a:t>.</a:t>
+            </a:r>
+            <a:endParaRPr lang="ko-KR" altLang="en-US" dirty="0"/>
+          </a:p>
+        </p:txBody>
+      </p:sp>
+      <p:sp>
+        <p:nvSpPr>
+          <p:cNvPr id="4" name="슬라이드 번호 개체 틀 3"/>
+          <p:cNvSpPr>
+            <a:spLocks noGrp="1"/>
+          </p:cNvSpPr>
+          <p:nvPr>
+            <p:ph type="sldNum" sz="quarter" idx="5"/>
+          </p:nvPr>
+        </p:nvSpPr>
+        <p:spPr/>
+        <p:txBody>
+          <a:bodyPr/>
+          <a:lstStyle/>
+          <a:p>
+            <a:fld id="{D92E1471-B013-43C5-87B9-D1355B3D4CBC}" type="slidenum">
+              <a:rPr lang="ko-KR" altLang="en-US" smtClean="0"/>
+              <a:t>12</a:t>
+            </a:fld>
+            <a:endParaRPr lang="ko-KR" altLang="en-US"/>
+          </a:p>
+        </p:txBody>
+      </p:sp>
+    </p:spTree>
+    <p:extLst>
+      <p:ext uri="{BB962C8B-B14F-4D97-AF65-F5344CB8AC3E}">
+        <p14:creationId xmlns:p14="http://schemas.microsoft.com/office/powerpoint/2010/main" val="914417888"/>
+      </p:ext>
+    </p:extLst>
+  </p:cSld>
+  <p:clrMapOvr>
+    <a:masterClrMapping/>
+  </p:clrMapOvr>
+</p:notes>
+</file>
+
+<file path=ppt/notesSlides/notesSlide13.xml><?xml version="1.0" encoding="utf-8"?>
+<p:notes xmlns:a="http://schemas.openxmlformats.org/drawingml/2006/main" xmlns:r="http://schemas.openxmlformats.org/officeDocument/2006/relationships" xmlns:p="http://schemas.openxmlformats.org/presentationml/2006/main">
+  <p:cSld>
+    <p:spTree>
+      <p:nvGrpSpPr>
+        <p:cNvPr id="1" name=""/>
+        <p:cNvGrpSpPr/>
+        <p:nvPr/>
+      </p:nvGrpSpPr>
+      <p:grpSpPr>
+        <a:xfrm>
+          <a:off x="0" y="0"/>
+          <a:ext cx="0" cy="0"/>
+          <a:chOff x="0" y="0"/>
+          <a:chExt cx="0" cy="0"/>
+        </a:xfrm>
+      </p:grpSpPr>
+      <p:sp>
+        <p:nvSpPr>
+          <p:cNvPr id="2" name="슬라이드 이미지 개체 틀 1"/>
+          <p:cNvSpPr>
+            <a:spLocks noGrp="1" noRot="1" noChangeAspect="1"/>
+          </p:cNvSpPr>
+          <p:nvPr>
+            <p:ph type="sldImg"/>
+          </p:nvPr>
+        </p:nvSpPr>
+        <p:spPr/>
+      </p:sp>
+      <p:sp>
+        <p:nvSpPr>
+          <p:cNvPr id="3" name="슬라이드 노트 개체 틀 2"/>
+          <p:cNvSpPr>
+            <a:spLocks noGrp="1"/>
+          </p:cNvSpPr>
+          <p:nvPr>
+            <p:ph type="body" idx="1"/>
+          </p:nvPr>
+        </p:nvSpPr>
+        <p:spPr/>
+        <p:txBody>
+          <a:bodyPr/>
+          <a:lstStyle/>
+          <a:p>
+            <a:endParaRPr lang="ko-KR" altLang="en-US" dirty="0"/>
+          </a:p>
+        </p:txBody>
+      </p:sp>
+      <p:sp>
+        <p:nvSpPr>
+          <p:cNvPr id="4" name="슬라이드 번호 개체 틀 3"/>
+          <p:cNvSpPr>
+            <a:spLocks noGrp="1"/>
+          </p:cNvSpPr>
+          <p:nvPr>
+            <p:ph type="sldNum" sz="quarter" idx="5"/>
+          </p:nvPr>
+        </p:nvSpPr>
+        <p:spPr/>
+        <p:txBody>
+          <a:bodyPr/>
+          <a:lstStyle/>
+          <a:p>
+            <a:fld id="{D92E1471-B013-43C5-87B9-D1355B3D4CBC}" type="slidenum">
+              <a:rPr lang="ko-KR" altLang="en-US" smtClean="0"/>
+              <a:t>13</a:t>
             </a:fld>
             <a:endParaRPr lang="ko-KR" altLang="en-US"/>
           </a:p>
@@ -1408,7 +1760,13 @@
   <p:cSld>
     <p:spTree>
       <p:nvGrpSpPr>
-        <p:cNvPr id="1" name=""/>
+        <p:cNvPr id="1" name="">
+          <a:extLst>
+            <a:ext uri="{FF2B5EF4-FFF2-40B4-BE49-F238E27FC236}">
+              <a16:creationId xmlns:a16="http://schemas.microsoft.com/office/drawing/2014/main" id="{0B7A3438-0254-C711-56B3-24D619A4175B}"/>
+            </a:ext>
+          </a:extLst>
+        </p:cNvPr>
         <p:cNvGrpSpPr/>
         <p:nvPr/>
       </p:nvGrpSpPr>
@@ -1422,7 +1780,13 @@
       </p:grpSpPr>
       <p:sp>
         <p:nvSpPr>
-          <p:cNvPr id="2" name="슬라이드 이미지 개체 틀 1"/>
+          <p:cNvPr id="2" name="슬라이드 이미지 개체 틀 1">
+            <a:extLst>
+              <a:ext uri="{FF2B5EF4-FFF2-40B4-BE49-F238E27FC236}">
+                <a16:creationId xmlns:a16="http://schemas.microsoft.com/office/drawing/2014/main" id="{0119B9F2-EF02-B494-1B5B-B9B31FD47EDC}"/>
+              </a:ext>
+            </a:extLst>
+          </p:cNvPr>
           <p:cNvSpPr>
             <a:spLocks noGrp="1" noRot="1" noChangeAspect="1"/>
           </p:cNvSpPr>
@@ -1434,7 +1798,13 @@
       </p:sp>
       <p:sp>
         <p:nvSpPr>
-          <p:cNvPr id="3" name="슬라이드 노트 개체 틀 2"/>
+          <p:cNvPr id="3" name="슬라이드 노트 개체 틀 2">
+            <a:extLst>
+              <a:ext uri="{FF2B5EF4-FFF2-40B4-BE49-F238E27FC236}">
+                <a16:creationId xmlns:a16="http://schemas.microsoft.com/office/drawing/2014/main" id="{936C006A-52D8-2E9E-61F2-D53DA2ABD3BF}"/>
+              </a:ext>
+            </a:extLst>
+          </p:cNvPr>
           <p:cNvSpPr>
             <a:spLocks noGrp="1"/>
           </p:cNvSpPr>
@@ -1448,20 +1818,48 @@
           <a:lstStyle/>
           <a:p>
             <a:r>
+              <a:rPr lang="en-US" altLang="ko-KR" dirty="0"/>
+              <a:t>SOF</a:t>
+            </a:r>
+            <a:r>
               <a:rPr lang="ko-KR" altLang="en-US" dirty="0"/>
-              <a:t>용서를 </a:t>
+              <a:t>는 </a:t>
             </a:r>
             <a:r>
               <a:rPr lang="ko-KR" altLang="en-US" dirty="0" err="1"/>
-              <a:t>해야하는</a:t>
+              <a:t>시츄에이션</a:t>
             </a:r>
             <a:r>
               <a:rPr lang="ko-KR" altLang="en-US" dirty="0"/>
-              <a:t> 이유는 </a:t>
+              <a:t> 오프 </a:t>
             </a:r>
             <a:r>
               <a:rPr lang="ko-KR" altLang="en-US" dirty="0" err="1"/>
-              <a:t>뭘까요</a:t>
+              <a:t>포기브로</a:t>
+            </a:r>
+            <a:r>
+              <a:rPr lang="ko-KR" altLang="en-US" dirty="0"/>
+              <a:t> 특정 상황을 가정하고 역할을 정해서 용서하는 연습을 하는 활동입니다</a:t>
+            </a:r>
+            <a:r>
+              <a:rPr lang="en-US" altLang="ko-KR" dirty="0"/>
+              <a:t>.</a:t>
+            </a:r>
+          </a:p>
+          <a:p>
+            <a:r>
+              <a:rPr lang="ko-KR" altLang="en-US" dirty="0"/>
+              <a:t>이 때 그냥 용서하면 안 되고 용서를 하는 사람은 잘못을 저지른 사람이 왜 이 행동을 했는지 공감하고 어떤 상처를 받았는지 표현한 후 용서해야 합니다</a:t>
+            </a:r>
+            <a:r>
+              <a:rPr lang="en-US" altLang="ko-KR" dirty="0"/>
+              <a:t>.</a:t>
+            </a:r>
+          </a:p>
+          <a:p>
+            <a:r>
+              <a:rPr lang="ko-KR" altLang="en-US" dirty="0"/>
+              <a:t>자 한번 예시로 보여드리겠습니다</a:t>
             </a:r>
             <a:r>
               <a:rPr lang="en-US" altLang="ko-KR" dirty="0"/>
@@ -1469,11 +1867,19 @@
             </a:r>
             <a:r>
               <a:rPr lang="ko-KR" altLang="en-US" dirty="0"/>
-              <a:t>남을 위한 것이 아닌 나를 </a:t>
+              <a:t>앞에 계신 남성 두 </a:t>
             </a:r>
             <a:r>
               <a:rPr lang="ko-KR" altLang="en-US" dirty="0" err="1"/>
-              <a:t>위함입니다</a:t>
+              <a:t>분이서</a:t>
+            </a:r>
+            <a:r>
+              <a:rPr lang="ko-KR" altLang="en-US" dirty="0"/>
+              <a:t> 서로 </a:t>
+            </a:r>
+            <a:r>
+              <a:rPr lang="ko-KR" altLang="en-US" dirty="0" err="1"/>
+              <a:t>마주봐주세요</a:t>
             </a:r>
             <a:r>
               <a:rPr lang="en-US" altLang="ko-KR" dirty="0"/>
@@ -1481,7 +1887,19 @@
             </a:r>
             <a:r>
               <a:rPr lang="ko-KR" altLang="en-US" dirty="0"/>
-              <a:t>용서를 하면 좋은 점은 다음과 같습니다</a:t>
+              <a:t>한 분이 여자친구고 </a:t>
+            </a:r>
+            <a:r>
+              <a:rPr lang="ko-KR" altLang="en-US" dirty="0" err="1"/>
+              <a:t>한분은</a:t>
+            </a:r>
+            <a:r>
+              <a:rPr lang="ko-KR" altLang="en-US" dirty="0"/>
+              <a:t> </a:t>
+            </a:r>
+            <a:r>
+              <a:rPr lang="ko-KR" altLang="en-US" dirty="0" err="1"/>
+              <a:t>남자친굽니다</a:t>
             </a:r>
             <a:r>
               <a:rPr lang="en-US" altLang="ko-KR" dirty="0"/>
@@ -1489,7 +1907,15 @@
             </a:r>
             <a:r>
               <a:rPr lang="ko-KR" altLang="en-US" dirty="0"/>
-              <a:t>먼저 남에게 베푼 관대함은 자신에게 돌아옵니다</a:t>
+              <a:t>상황은 남자친구가 </a:t>
+            </a:r>
+            <a:r>
+              <a:rPr lang="ko-KR" altLang="en-US" dirty="0" err="1"/>
+              <a:t>친구랑</a:t>
+            </a:r>
+            <a:r>
+              <a:rPr lang="ko-KR" altLang="en-US" dirty="0"/>
+              <a:t> 논다면서 클럽에 갔다는 상황입니다</a:t>
             </a:r>
             <a:r>
               <a:rPr lang="en-US" altLang="ko-KR" dirty="0"/>
@@ -1497,7 +1923,7 @@
             </a:r>
             <a:r>
               <a:rPr lang="ko-KR" altLang="en-US" dirty="0"/>
-              <a:t>만약 내가 친구의 사소한 잘못을 용서한다면 나중에 내가 친구에게 사소한 잘못을 저질러도 웃고 넘어가겠죠</a:t>
+              <a:t>남자친구분은 진심으로 사과해주세요</a:t>
             </a:r>
             <a:r>
               <a:rPr lang="en-US" altLang="ko-KR" dirty="0"/>
@@ -1505,11 +1931,7 @@
             </a:r>
             <a:r>
               <a:rPr lang="ko-KR" altLang="en-US" dirty="0"/>
-              <a:t>다음 인간관계가 </a:t>
-            </a:r>
-            <a:r>
-              <a:rPr lang="ko-KR" altLang="en-US" dirty="0" err="1"/>
-              <a:t>원만해집니다</a:t>
+              <a:t>여자친구분은 남자친구분이 왜 이런 짓을 했을까 말씀해주시면 됩니다</a:t>
             </a:r>
             <a:r>
               <a:rPr lang="en-US" altLang="ko-KR" dirty="0"/>
@@ -1517,11 +1939,7 @@
             </a:r>
             <a:r>
               <a:rPr lang="ko-KR" altLang="en-US" dirty="0"/>
-              <a:t>사소한 일로도 따지고 드는 사람은 친구가 생기는 속도보다 손절하는 속도가 더 </a:t>
-            </a:r>
-            <a:r>
-              <a:rPr lang="ko-KR" altLang="en-US" dirty="0" err="1"/>
-              <a:t>빠를겁니다</a:t>
+              <a:t>최대한 공감 해 주세요</a:t>
             </a:r>
             <a:r>
               <a:rPr lang="en-US" altLang="ko-KR" dirty="0"/>
@@ -1529,51 +1947,40 @@
             </a:r>
             <a:r>
               <a:rPr lang="ko-KR" altLang="en-US" dirty="0"/>
-              <a:t>용서는 좋은 관계를 만들기 위한 첫 단계입니다</a:t>
+              <a:t>네 잘 </a:t>
+            </a:r>
+            <a:r>
+              <a:rPr lang="ko-KR" altLang="en-US" dirty="0" err="1"/>
+              <a:t>들었구요</a:t>
+            </a:r>
+            <a:r>
+              <a:rPr lang="ko-KR" altLang="en-US" dirty="0"/>
+              <a:t> 어떤 상처를 받으셨나요</a:t>
             </a:r>
             <a:r>
               <a:rPr lang="en-US" altLang="ko-KR" dirty="0"/>
-              <a:t>. </a:t>
+              <a:t>? </a:t>
             </a:r>
             <a:r>
               <a:rPr lang="ko-KR" altLang="en-US" dirty="0"/>
-              <a:t>마지막으로 자신에 대한 세간의 평가가 올라갑니다</a:t>
-            </a:r>
-            <a:r>
-              <a:rPr lang="en-US" altLang="ko-KR" dirty="0"/>
-              <a:t>. “</a:t>
-            </a:r>
-            <a:r>
-              <a:rPr lang="ko-KR" altLang="en-US" dirty="0"/>
-              <a:t>아 저 친구는 넓은 마음을 지니고 있으니 사람이 좋아</a:t>
-            </a:r>
-            <a:r>
-              <a:rPr lang="en-US" altLang="ko-KR" dirty="0"/>
-              <a:t>“, “</a:t>
-            </a:r>
-            <a:r>
-              <a:rPr lang="ko-KR" altLang="en-US" dirty="0"/>
-              <a:t>저 사람 성격 정말 좋다</a:t>
-            </a:r>
-            <a:r>
-              <a:rPr lang="en-US" altLang="ko-KR" dirty="0"/>
-              <a:t>” </a:t>
-            </a:r>
-            <a:r>
-              <a:rPr lang="ko-KR" altLang="en-US" dirty="0"/>
-              <a:t>처럼 용서 하나만으로 나를 좋은 사람으로 만들 수 있습니다</a:t>
+              <a:t>네 지금까지 말씀해주신 내용으로 진심으로 용서해주시면 됩니다</a:t>
             </a:r>
             <a:r>
               <a:rPr lang="en-US" altLang="ko-KR" dirty="0"/>
               <a:t>.</a:t>
             </a:r>
-            <a:endParaRPr lang="ko-KR" altLang="en-US" dirty="0"/>
-          </a:p>
-        </p:txBody>
-      </p:sp>
-      <p:sp>
-        <p:nvSpPr>
-          <p:cNvPr id="4" name="슬라이드 번호 개체 틀 3"/>
+          </a:p>
+        </p:txBody>
+      </p:sp>
+      <p:sp>
+        <p:nvSpPr>
+          <p:cNvPr id="4" name="슬라이드 번호 개체 틀 3">
+            <a:extLst>
+              <a:ext uri="{FF2B5EF4-FFF2-40B4-BE49-F238E27FC236}">
+                <a16:creationId xmlns:a16="http://schemas.microsoft.com/office/drawing/2014/main" id="{DEE2BBBD-D46A-11E0-1DE0-E5F113B2B3B9}"/>
+              </a:ext>
+            </a:extLst>
+          </p:cNvPr>
           <p:cNvSpPr>
             <a:spLocks noGrp="1"/>
           </p:cNvSpPr>
@@ -1597,7 +2004,7 @@
     </p:spTree>
     <p:extLst>
       <p:ext uri="{BB962C8B-B14F-4D97-AF65-F5344CB8AC3E}">
-        <p14:creationId xmlns:p14="http://schemas.microsoft.com/office/powerpoint/2010/main" val="1470649305"/>
+        <p14:creationId xmlns:p14="http://schemas.microsoft.com/office/powerpoint/2010/main" val="1777091511"/>
       </p:ext>
     </p:extLst>
   </p:cSld>
@@ -1612,7 +2019,13 @@
   <p:cSld>
     <p:spTree>
       <p:nvGrpSpPr>
-        <p:cNvPr id="1" name=""/>
+        <p:cNvPr id="1" name="">
+          <a:extLst>
+            <a:ext uri="{FF2B5EF4-FFF2-40B4-BE49-F238E27FC236}">
+              <a16:creationId xmlns:a16="http://schemas.microsoft.com/office/drawing/2014/main" id="{7C04E51D-65C3-F778-B8B8-546652EBAFAF}"/>
+            </a:ext>
+          </a:extLst>
+        </p:cNvPr>
         <p:cNvGrpSpPr/>
         <p:nvPr/>
       </p:nvGrpSpPr>
@@ -1626,7 +2039,13 @@
       </p:grpSpPr>
       <p:sp>
         <p:nvSpPr>
-          <p:cNvPr id="2" name="슬라이드 이미지 개체 틀 1"/>
+          <p:cNvPr id="2" name="슬라이드 이미지 개체 틀 1">
+            <a:extLst>
+              <a:ext uri="{FF2B5EF4-FFF2-40B4-BE49-F238E27FC236}">
+                <a16:creationId xmlns:a16="http://schemas.microsoft.com/office/drawing/2014/main" id="{35553C24-EFD6-3C79-892D-0ABC526B3315}"/>
+              </a:ext>
+            </a:extLst>
+          </p:cNvPr>
           <p:cNvSpPr>
             <a:spLocks noGrp="1" noRot="1" noChangeAspect="1"/>
           </p:cNvSpPr>
@@ -1638,7 +2057,13 @@
       </p:sp>
       <p:sp>
         <p:nvSpPr>
-          <p:cNvPr id="3" name="슬라이드 노트 개체 틀 2"/>
+          <p:cNvPr id="3" name="슬라이드 노트 개체 틀 2">
+            <a:extLst>
+              <a:ext uri="{FF2B5EF4-FFF2-40B4-BE49-F238E27FC236}">
+                <a16:creationId xmlns:a16="http://schemas.microsoft.com/office/drawing/2014/main" id="{576E3978-0BF5-8481-B304-4BAE46E8059B}"/>
+              </a:ext>
+            </a:extLst>
+          </p:cNvPr>
           <p:cNvSpPr>
             <a:spLocks noGrp="1"/>
           </p:cNvSpPr>
@@ -1652,20 +2077,169 @@
           <a:lstStyle/>
           <a:p>
             <a:r>
+              <a:rPr lang="en-US" altLang="ko-KR" dirty="0"/>
+              <a:t>SOF</a:t>
+            </a:r>
+            <a:r>
               <a:rPr lang="ko-KR" altLang="en-US" dirty="0"/>
-              <a:t>이제 용서하는 방법에 대해서 알아보겠습니다</a:t>
+              <a:t>는 </a:t>
+            </a:r>
+            <a:r>
+              <a:rPr lang="ko-KR" altLang="en-US" dirty="0" err="1"/>
+              <a:t>시츄에이션</a:t>
+            </a:r>
+            <a:r>
+              <a:rPr lang="ko-KR" altLang="en-US" dirty="0"/>
+              <a:t> 오프 </a:t>
+            </a:r>
+            <a:r>
+              <a:rPr lang="ko-KR" altLang="en-US" dirty="0" err="1"/>
+              <a:t>포기브로</a:t>
+            </a:r>
+            <a:r>
+              <a:rPr lang="ko-KR" altLang="en-US" dirty="0"/>
+              <a:t> 특정 상황을 가정하고 역할을 정해서 용서하는 연습을 하는 활동입니다</a:t>
             </a:r>
             <a:r>
               <a:rPr lang="en-US" altLang="ko-KR" dirty="0"/>
               <a:t>.</a:t>
             </a:r>
-            <a:endParaRPr lang="ko-KR" altLang="en-US" dirty="0"/>
-          </a:p>
-        </p:txBody>
-      </p:sp>
-      <p:sp>
-        <p:nvSpPr>
-          <p:cNvPr id="4" name="슬라이드 번호 개체 틀 3"/>
+          </a:p>
+          <a:p>
+            <a:r>
+              <a:rPr lang="ko-KR" altLang="en-US" dirty="0"/>
+              <a:t>이 때 그냥 용서하면 안 되고 용서를 하는 사람은 잘못을 저지른 사람이 왜 이 행동을 했는지 공감하고 어떤 상처를 받았는지 표현한 후 용서해야 합니다</a:t>
+            </a:r>
+            <a:r>
+              <a:rPr lang="en-US" altLang="ko-KR" dirty="0"/>
+              <a:t>.</a:t>
+            </a:r>
+          </a:p>
+          <a:p>
+            <a:r>
+              <a:rPr lang="ko-KR" altLang="en-US" dirty="0"/>
+              <a:t>자 한번 예시로 보여드리겠습니다</a:t>
+            </a:r>
+            <a:r>
+              <a:rPr lang="en-US" altLang="ko-KR" dirty="0"/>
+              <a:t>. </a:t>
+            </a:r>
+            <a:r>
+              <a:rPr lang="ko-KR" altLang="en-US" dirty="0"/>
+              <a:t>앞에 계신 남성 두 </a:t>
+            </a:r>
+            <a:r>
+              <a:rPr lang="ko-KR" altLang="en-US" dirty="0" err="1"/>
+              <a:t>분이서</a:t>
+            </a:r>
+            <a:r>
+              <a:rPr lang="ko-KR" altLang="en-US" dirty="0"/>
+              <a:t> 서로 </a:t>
+            </a:r>
+            <a:r>
+              <a:rPr lang="ko-KR" altLang="en-US" dirty="0" err="1"/>
+              <a:t>마주봐주세요</a:t>
+            </a:r>
+            <a:r>
+              <a:rPr lang="en-US" altLang="ko-KR" dirty="0"/>
+              <a:t>. </a:t>
+            </a:r>
+            <a:r>
+              <a:rPr lang="ko-KR" altLang="en-US" dirty="0"/>
+              <a:t>한 분이 여자친구고 </a:t>
+            </a:r>
+            <a:r>
+              <a:rPr lang="ko-KR" altLang="en-US" dirty="0" err="1"/>
+              <a:t>한분은</a:t>
+            </a:r>
+            <a:r>
+              <a:rPr lang="ko-KR" altLang="en-US" dirty="0"/>
+              <a:t> </a:t>
+            </a:r>
+            <a:r>
+              <a:rPr lang="ko-KR" altLang="en-US" dirty="0" err="1"/>
+              <a:t>남자친굽니다</a:t>
+            </a:r>
+            <a:r>
+              <a:rPr lang="en-US" altLang="ko-KR" dirty="0"/>
+              <a:t>. </a:t>
+            </a:r>
+            <a:r>
+              <a:rPr lang="ko-KR" altLang="en-US" dirty="0"/>
+              <a:t>상황은 남자친구가 </a:t>
+            </a:r>
+            <a:r>
+              <a:rPr lang="ko-KR" altLang="en-US" dirty="0" err="1"/>
+              <a:t>친구랑</a:t>
+            </a:r>
+            <a:r>
+              <a:rPr lang="ko-KR" altLang="en-US" dirty="0"/>
+              <a:t> 논다면서 클럽에 갔다는 상황입니다</a:t>
+            </a:r>
+            <a:r>
+              <a:rPr lang="en-US" altLang="ko-KR" dirty="0"/>
+              <a:t>. </a:t>
+            </a:r>
+            <a:r>
+              <a:rPr lang="ko-KR" altLang="en-US" dirty="0"/>
+              <a:t>남자친구분은 진심으로 사과해주세요</a:t>
+            </a:r>
+            <a:r>
+              <a:rPr lang="en-US" altLang="ko-KR" dirty="0"/>
+              <a:t>. </a:t>
+            </a:r>
+            <a:r>
+              <a:rPr lang="ko-KR" altLang="en-US" dirty="0"/>
+              <a:t>여자친구분은 남자친구분이 왜 이런 짓을 했을까 말씀해주시면 됩니다</a:t>
+            </a:r>
+            <a:r>
+              <a:rPr lang="en-US" altLang="ko-KR" dirty="0"/>
+              <a:t>. </a:t>
+            </a:r>
+            <a:r>
+              <a:rPr lang="ko-KR" altLang="en-US" dirty="0"/>
+              <a:t>최대한 공감 해 주세요</a:t>
+            </a:r>
+            <a:r>
+              <a:rPr lang="en-US" altLang="ko-KR" dirty="0"/>
+              <a:t>. </a:t>
+            </a:r>
+            <a:r>
+              <a:rPr lang="ko-KR" altLang="en-US" dirty="0"/>
+              <a:t>네 잘 </a:t>
+            </a:r>
+            <a:r>
+              <a:rPr lang="ko-KR" altLang="en-US" dirty="0" err="1"/>
+              <a:t>들었구요</a:t>
+            </a:r>
+            <a:r>
+              <a:rPr lang="ko-KR" altLang="en-US" dirty="0"/>
+              <a:t> 어떤 상처를 받으셨나요</a:t>
+            </a:r>
+            <a:r>
+              <a:rPr lang="en-US" altLang="ko-KR" dirty="0"/>
+              <a:t>? </a:t>
+            </a:r>
+            <a:r>
+              <a:rPr lang="ko-KR" altLang="en-US" dirty="0"/>
+              <a:t>네 지금까지 말씀해주신 내용으로 진심으로 용서해주시면 됩니다</a:t>
+            </a:r>
+            <a:r>
+              <a:rPr lang="en-US" altLang="ko-KR" dirty="0"/>
+              <a:t>.</a:t>
+            </a:r>
+          </a:p>
+        </p:txBody>
+      </p:sp>
+      <p:sp>
+        <p:nvSpPr>
+          <p:cNvPr id="4" name="슬라이드 번호 개체 틀 3">
+            <a:extLst>
+              <a:ext uri="{FF2B5EF4-FFF2-40B4-BE49-F238E27FC236}">
+                <a16:creationId xmlns:a16="http://schemas.microsoft.com/office/drawing/2014/main" id="{A7B32C7F-24F8-407D-7268-0DC5C52AB422}"/>
+              </a:ext>
+            </a:extLst>
+          </p:cNvPr>
           <p:cNvSpPr>
             <a:spLocks noGrp="1"/>
           </p:cNvSpPr>
@@ -1689,7 +2263,7 @@
     </p:spTree>
     <p:extLst>
       <p:ext uri="{BB962C8B-B14F-4D97-AF65-F5344CB8AC3E}">
-        <p14:creationId xmlns:p14="http://schemas.microsoft.com/office/powerpoint/2010/main" val="1727873521"/>
+        <p14:creationId xmlns:p14="http://schemas.microsoft.com/office/powerpoint/2010/main" val="4019812735"/>
       </p:ext>
     </p:extLst>
   </p:cSld>
@@ -1745,7 +2319,19 @@
           <a:p>
             <a:r>
               <a:rPr lang="ko-KR" altLang="en-US" dirty="0"/>
-              <a:t>먼저 우리는 용서하기 전 침착해질 필요가 있습니다</a:t>
+              <a:t>용서를 </a:t>
+            </a:r>
+            <a:r>
+              <a:rPr lang="ko-KR" altLang="en-US" dirty="0" err="1"/>
+              <a:t>해야하는</a:t>
+            </a:r>
+            <a:r>
+              <a:rPr lang="ko-KR" altLang="en-US" dirty="0"/>
+              <a:t> 이유는 </a:t>
+            </a:r>
+            <a:r>
+              <a:rPr lang="ko-KR" altLang="en-US" dirty="0" err="1"/>
+              <a:t>뭘까요</a:t>
             </a:r>
             <a:r>
               <a:rPr lang="en-US" altLang="ko-KR" dirty="0"/>
@@ -1753,35 +2339,11 @@
             </a:r>
             <a:r>
               <a:rPr lang="ko-KR" altLang="en-US" dirty="0"/>
-              <a:t>분노는 감성의 영역이며 이는 이성적인 사고를 마비시킵니다</a:t>
-            </a:r>
-            <a:r>
-              <a:rPr lang="en-US" altLang="ko-KR" dirty="0"/>
-              <a:t>.</a:t>
-            </a:r>
-          </a:p>
-          <a:p>
-            <a:r>
-              <a:rPr lang="ko-KR" altLang="en-US" dirty="0"/>
-              <a:t>따라서 이성적으로 판단하기 위해 분노를 잠재우고 </a:t>
+              <a:t>남을 위한 것이 아닌 나를 </a:t>
             </a:r>
             <a:r>
               <a:rPr lang="ko-KR" altLang="en-US" dirty="0" err="1"/>
-              <a:t>침착해져야</a:t>
-            </a:r>
-            <a:r>
-              <a:rPr lang="ko-KR" altLang="en-US" dirty="0"/>
-              <a:t> 합니다</a:t>
-            </a:r>
-            <a:r>
-              <a:rPr lang="en-US" altLang="ko-KR" dirty="0"/>
-              <a:t>.</a:t>
-            </a:r>
-          </a:p>
-          <a:p>
-            <a:r>
-              <a:rPr lang="ko-KR" altLang="en-US" dirty="0"/>
-              <a:t>다음 상대방이 왜 잘못을 저질렀는지 공감을 할 필요가 있습니다</a:t>
+              <a:t>위함입니다</a:t>
             </a:r>
             <a:r>
               <a:rPr lang="en-US" altLang="ko-KR" dirty="0"/>
@@ -1789,7 +2351,7 @@
             </a:r>
             <a:r>
               <a:rPr lang="ko-KR" altLang="en-US" dirty="0"/>
-              <a:t>대체 무슨 생각이었길래 이런 잘못을 했을까</a:t>
+              <a:t>용서를 하면 좋은 점은 다음과 같습니다</a:t>
             </a:r>
             <a:r>
               <a:rPr lang="en-US" altLang="ko-KR" dirty="0"/>
@@ -1797,25 +2359,7 @@
             </a:r>
             <a:r>
               <a:rPr lang="ko-KR" altLang="en-US" dirty="0"/>
-              <a:t>나였어도 그런 행동을 취했을까</a:t>
-            </a:r>
-            <a:r>
-              <a:rPr lang="en-US" altLang="ko-KR" dirty="0"/>
-              <a:t>?</a:t>
-            </a:r>
-            <a:r>
-              <a:rPr lang="ko-KR" altLang="en-US" dirty="0"/>
-              <a:t>를 고민합니다</a:t>
-            </a:r>
-            <a:r>
-              <a:rPr lang="en-US" altLang="ko-KR" dirty="0"/>
-              <a:t>.</a:t>
-            </a:r>
-          </a:p>
-          <a:p>
-            <a:r>
-              <a:rPr lang="ko-KR" altLang="en-US" dirty="0"/>
-              <a:t>세번째로는 내가 받은 상처를 마주하는 것입니다</a:t>
+              <a:t>먼저 남에게 베푼 관대함은 자신에게 돌아옵니다</a:t>
             </a:r>
             <a:r>
               <a:rPr lang="en-US" altLang="ko-KR" dirty="0"/>
@@ -1823,7 +2367,7 @@
             </a:r>
             <a:r>
               <a:rPr lang="ko-KR" altLang="en-US" dirty="0"/>
-              <a:t>내가 받은 상처에서 도망치는 것이 아니라 받아들이는 과정이 필요합니다</a:t>
+              <a:t>만약 내가 친구의 사소한 잘못을 용서한다면 나중에 내가 친구에게 사소한 잘못을 저질러도 웃고 넘어가겠죠</a:t>
             </a:r>
             <a:r>
               <a:rPr lang="en-US" altLang="ko-KR" dirty="0"/>
@@ -1831,7 +2375,11 @@
             </a:r>
             <a:r>
               <a:rPr lang="ko-KR" altLang="en-US" dirty="0"/>
-              <a:t>그래야 마음에서 우러나는 용서를 할 수 있습니다</a:t>
+              <a:t>다음 인간관계가 </a:t>
+            </a:r>
+            <a:r>
+              <a:rPr lang="ko-KR" altLang="en-US" dirty="0" err="1"/>
+              <a:t>원만해집니다</a:t>
             </a:r>
             <a:r>
               <a:rPr lang="en-US" altLang="ko-KR" dirty="0"/>
@@ -1839,7 +2387,11 @@
             </a:r>
             <a:r>
               <a:rPr lang="ko-KR" altLang="en-US" dirty="0"/>
-              <a:t>마지막으로 용서 한 후 이 일에 대해서 잊는 것입니다</a:t>
+              <a:t>사소한 일로도 따지고 드는 사람은 친구가 생기는 속도보다 손절하는 속도가 더 </a:t>
+            </a:r>
+            <a:r>
+              <a:rPr lang="ko-KR" altLang="en-US" dirty="0" err="1"/>
+              <a:t>빠를겁니다</a:t>
             </a:r>
             <a:r>
               <a:rPr lang="en-US" altLang="ko-KR" dirty="0"/>
@@ -1847,31 +2399,39 @@
             </a:r>
             <a:r>
               <a:rPr lang="ko-KR" altLang="en-US" dirty="0"/>
-              <a:t>사과했고 용서 받았으면 이미 끝난 일이니 </a:t>
+              <a:t>용서는 좋은 관계를 만들기 위한 첫 단계입니다</a:t>
             </a:r>
             <a:r>
               <a:rPr lang="en-US" altLang="ko-KR" dirty="0"/>
-              <a:t>20</a:t>
+              <a:t>. </a:t>
             </a:r>
             <a:r>
               <a:rPr lang="ko-KR" altLang="en-US" dirty="0"/>
-              <a:t>년 </a:t>
+              <a:t>마지막으로 자신에 대한 세간의 평가가 올라갑니다</a:t>
             </a:r>
             <a:r>
               <a:rPr lang="en-US" altLang="ko-KR" dirty="0"/>
-              <a:t>30</a:t>
+              <a:t>. “</a:t>
             </a:r>
             <a:r>
               <a:rPr lang="ko-KR" altLang="en-US" dirty="0"/>
-              <a:t>년이 지나고도 너 왜 그때 그렇게 했어 라면서 </a:t>
-            </a:r>
-            <a:r>
-              <a:rPr lang="ko-KR" altLang="en-US" dirty="0" err="1"/>
-              <a:t>따지는건</a:t>
+              <a:t>아 저 친구는 넓은 마음을 지니고 있으니 사람이 좋아</a:t>
+            </a:r>
+            <a:r>
+              <a:rPr lang="en-US" altLang="ko-KR" dirty="0"/>
+              <a:t>“, “</a:t>
             </a:r>
             <a:r>
               <a:rPr lang="ko-KR" altLang="en-US" dirty="0"/>
-              <a:t> 말이 안되죠</a:t>
+              <a:t>저 사람 성격 정말 좋다</a:t>
+            </a:r>
+            <a:r>
+              <a:rPr lang="en-US" altLang="ko-KR" dirty="0"/>
+              <a:t>” </a:t>
+            </a:r>
+            <a:r>
+              <a:rPr lang="ko-KR" altLang="en-US" dirty="0"/>
+              <a:t>처럼 용서 하나만으로 나를 좋은 사람으로 만들 수 있습니다</a:t>
             </a:r>
             <a:r>
               <a:rPr lang="en-US" altLang="ko-KR" dirty="0"/>
@@ -1907,7 +2467,7 @@
     </p:spTree>
     <p:extLst>
       <p:ext uri="{BB962C8B-B14F-4D97-AF65-F5344CB8AC3E}">
-        <p14:creationId xmlns:p14="http://schemas.microsoft.com/office/powerpoint/2010/main" val="1957142138"/>
+        <p14:creationId xmlns:p14="http://schemas.microsoft.com/office/powerpoint/2010/main" val="1470649305"/>
       </p:ext>
     </p:extLst>
   </p:cSld>
@@ -1963,47 +2523,7 @@
           <a:p>
             <a:r>
               <a:rPr lang="ko-KR" altLang="en-US" dirty="0"/>
-              <a:t>용서는 문제를 해결하기 가장 쉬운 방법입니다</a:t>
-            </a:r>
-            <a:r>
-              <a:rPr lang="en-US" altLang="ko-KR" dirty="0"/>
-              <a:t>. </a:t>
-            </a:r>
-            <a:r>
-              <a:rPr lang="ko-KR" altLang="en-US" dirty="0"/>
-              <a:t>사람과 </a:t>
-            </a:r>
-            <a:r>
-              <a:rPr lang="ko-KR" altLang="en-US" dirty="0" err="1"/>
-              <a:t>사람간의</a:t>
-            </a:r>
-            <a:r>
-              <a:rPr lang="ko-KR" altLang="en-US" dirty="0"/>
-              <a:t> 감정의 골은 쉽게 없어지지 않습니다</a:t>
-            </a:r>
-            <a:r>
-              <a:rPr lang="en-US" altLang="ko-KR" dirty="0"/>
-              <a:t>. </a:t>
-            </a:r>
-            <a:r>
-              <a:rPr lang="ko-KR" altLang="en-US" dirty="0"/>
-              <a:t>제대로 끝마치지 않은 갈등은 언제 어디서 문제를 일으킬지 모릅니다</a:t>
-            </a:r>
-            <a:r>
-              <a:rPr lang="en-US" altLang="ko-KR" dirty="0"/>
-              <a:t>. </a:t>
-            </a:r>
-            <a:r>
-              <a:rPr lang="ko-KR" altLang="en-US" dirty="0"/>
-              <a:t>용서는 갈등을 가장 빠르고 간단하게 해결할 수 있는 첫번째 방법입니다</a:t>
-            </a:r>
-            <a:r>
-              <a:rPr lang="en-US" altLang="ko-KR" dirty="0"/>
-              <a:t>. </a:t>
-            </a:r>
-            <a:r>
-              <a:rPr lang="ko-KR" altLang="en-US" dirty="0"/>
-              <a:t>그러니 여러분 모두 하해와 같은 마음을 지녔으면 좋겠습니다</a:t>
+              <a:t>이제 용서하는 방법에 대해서 알아보겠습니다</a:t>
             </a:r>
             <a:r>
               <a:rPr lang="en-US" altLang="ko-KR" dirty="0"/>
@@ -2039,7 +2559,7 @@
     </p:spTree>
     <p:extLst>
       <p:ext uri="{BB962C8B-B14F-4D97-AF65-F5344CB8AC3E}">
-        <p14:creationId xmlns:p14="http://schemas.microsoft.com/office/powerpoint/2010/main" val="3913929150"/>
+        <p14:creationId xmlns:p14="http://schemas.microsoft.com/office/powerpoint/2010/main" val="1727873521"/>
       </p:ext>
     </p:extLst>
   </p:cSld>
@@ -2196,7 +2716,7 @@
           <a:p>
             <a:fld id="{67931813-1762-4F46-95FC-F1AA88D864B1}" type="datetimeFigureOut">
               <a:rPr lang="ko-KR" altLang="en-US" smtClean="0"/>
-              <a:t>2026-05-06</a:t>
+              <a:t>2026-05-19</a:t>
             </a:fld>
             <a:endParaRPr lang="ko-KR" altLang="en-US"/>
           </a:p>
@@ -2394,7 +2914,7 @@
           <a:p>
             <a:fld id="{67931813-1762-4F46-95FC-F1AA88D864B1}" type="datetimeFigureOut">
               <a:rPr lang="ko-KR" altLang="en-US" smtClean="0"/>
-              <a:t>2026-05-06</a:t>
+              <a:t>2026-05-19</a:t>
             </a:fld>
             <a:endParaRPr lang="ko-KR" altLang="en-US"/>
           </a:p>
@@ -2602,7 +3122,7 @@
           <a:p>
             <a:fld id="{67931813-1762-4F46-95FC-F1AA88D864B1}" type="datetimeFigureOut">
               <a:rPr lang="ko-KR" altLang="en-US" smtClean="0"/>
-              <a:t>2026-05-06</a:t>
+              <a:t>2026-05-19</a:t>
             </a:fld>
             <a:endParaRPr lang="ko-KR" altLang="en-US"/>
           </a:p>
@@ -2870,7 +3390,7 @@
           <a:p>
             <a:fld id="{67931813-1762-4F46-95FC-F1AA88D864B1}" type="datetimeFigureOut">
               <a:rPr lang="ko-KR" altLang="en-US" smtClean="0"/>
-              <a:t>2026-05-06</a:t>
+              <a:t>2026-05-19</a:t>
             </a:fld>
             <a:endParaRPr lang="ko-KR" altLang="en-US"/>
           </a:p>
@@ -3145,7 +3665,7 @@
           <a:p>
             <a:fld id="{67931813-1762-4F46-95FC-F1AA88D864B1}" type="datetimeFigureOut">
               <a:rPr lang="ko-KR" altLang="en-US" smtClean="0"/>
-              <a:t>2026-05-06</a:t>
+              <a:t>2026-05-19</a:t>
             </a:fld>
             <a:endParaRPr lang="ko-KR" altLang="en-US"/>
           </a:p>
@@ -3410,7 +3930,7 @@
           <a:p>
             <a:fld id="{67931813-1762-4F46-95FC-F1AA88D864B1}" type="datetimeFigureOut">
               <a:rPr lang="ko-KR" altLang="en-US" smtClean="0"/>
-              <a:t>2026-05-06</a:t>
+              <a:t>2026-05-19</a:t>
             </a:fld>
             <a:endParaRPr lang="ko-KR" altLang="en-US"/>
           </a:p>
@@ -3822,7 +4342,7 @@
           <a:p>
             <a:fld id="{67931813-1762-4F46-95FC-F1AA88D864B1}" type="datetimeFigureOut">
               <a:rPr lang="ko-KR" altLang="en-US" smtClean="0"/>
-              <a:t>2026-05-06</a:t>
+              <a:t>2026-05-19</a:t>
             </a:fld>
             <a:endParaRPr lang="ko-KR" altLang="en-US"/>
           </a:p>
@@ -3963,7 +4483,7 @@
           <a:p>
             <a:fld id="{67931813-1762-4F46-95FC-F1AA88D864B1}" type="datetimeFigureOut">
               <a:rPr lang="ko-KR" altLang="en-US" smtClean="0"/>
-              <a:t>2026-05-06</a:t>
+              <a:t>2026-05-19</a:t>
             </a:fld>
             <a:endParaRPr lang="ko-KR" altLang="en-US"/>
           </a:p>
@@ -4076,7 +4596,7 @@
           <a:p>
             <a:fld id="{67931813-1762-4F46-95FC-F1AA88D864B1}" type="datetimeFigureOut">
               <a:rPr lang="ko-KR" altLang="en-US" smtClean="0"/>
-              <a:t>2026-05-06</a:t>
+              <a:t>2026-05-19</a:t>
             </a:fld>
             <a:endParaRPr lang="ko-KR" altLang="en-US"/>
           </a:p>
@@ -4387,7 +4907,7 @@
           <a:p>
             <a:fld id="{67931813-1762-4F46-95FC-F1AA88D864B1}" type="datetimeFigureOut">
               <a:rPr lang="ko-KR" altLang="en-US" smtClean="0"/>
-              <a:t>2026-05-06</a:t>
+              <a:t>2026-05-19</a:t>
             </a:fld>
             <a:endParaRPr lang="ko-KR" altLang="en-US"/>
           </a:p>
@@ -4675,7 +5195,7 @@
           <a:p>
             <a:fld id="{67931813-1762-4F46-95FC-F1AA88D864B1}" type="datetimeFigureOut">
               <a:rPr lang="ko-KR" altLang="en-US" smtClean="0"/>
-              <a:t>2026-05-06</a:t>
+              <a:t>2026-05-19</a:t>
             </a:fld>
             <a:endParaRPr lang="ko-KR" altLang="en-US"/>
           </a:p>
@@ -4916,7 +5436,7 @@
           <a:p>
             <a:fld id="{67931813-1762-4F46-95FC-F1AA88D864B1}" type="datetimeFigureOut">
               <a:rPr lang="ko-KR" altLang="en-US" smtClean="0"/>
-              <a:t>2026-05-06</a:t>
+              <a:t>2026-05-19</a:t>
             </a:fld>
             <a:endParaRPr lang="ko-KR" altLang="en-US"/>
           </a:p>
@@ -5920,6 +6440,628 @@
   <p:cSld>
     <p:spTree>
       <p:nvGrpSpPr>
+        <p:cNvPr id="1" name=""/>
+        <p:cNvGrpSpPr/>
+        <p:nvPr/>
+      </p:nvGrpSpPr>
+      <p:grpSpPr>
+        <a:xfrm>
+          <a:off x="0" y="0"/>
+          <a:ext cx="0" cy="0"/>
+          <a:chOff x="0" y="0"/>
+          <a:chExt cx="0" cy="0"/>
+        </a:xfrm>
+      </p:grpSpPr>
+      <p:sp>
+        <p:nvSpPr>
+          <p:cNvPr id="11" name="Shape 4">
+            <a:extLst>
+              <a:ext uri="{FF2B5EF4-FFF2-40B4-BE49-F238E27FC236}">
+                <a16:creationId xmlns:a16="http://schemas.microsoft.com/office/drawing/2014/main" id="{27AF0FFC-6FD2-CCA3-3B22-35DA38F786F4}"/>
+              </a:ext>
+            </a:extLst>
+          </p:cNvPr>
+          <p:cNvSpPr/>
+          <p:nvPr/>
+        </p:nvSpPr>
+        <p:spPr>
+          <a:xfrm>
+            <a:off x="4126028" y="1762706"/>
+            <a:ext cx="7645717" cy="4700979"/>
+          </a:xfrm>
+          <a:prstGeom prst="rect">
+            <a:avLst/>
+          </a:prstGeom>
+          <a:solidFill>
+            <a:srgbClr val="EAF2EF"/>
+          </a:solidFill>
+          <a:ln/>
+        </p:spPr>
+        <p:txBody>
+          <a:bodyPr/>
+          <a:lstStyle/>
+          <a:p>
+            <a:endParaRPr lang="ko-KR" altLang="en-US" sz="2400"/>
+          </a:p>
+        </p:txBody>
+      </p:sp>
+      <p:sp>
+        <p:nvSpPr>
+          <p:cNvPr id="5" name="Shape 0">
+            <a:extLst>
+              <a:ext uri="{FF2B5EF4-FFF2-40B4-BE49-F238E27FC236}">
+                <a16:creationId xmlns:a16="http://schemas.microsoft.com/office/drawing/2014/main" id="{4C706DBD-FF53-006A-3FE6-B91EB63417E0}"/>
+              </a:ext>
+            </a:extLst>
+          </p:cNvPr>
+          <p:cNvSpPr/>
+          <p:nvPr/>
+        </p:nvSpPr>
+        <p:spPr>
+          <a:xfrm>
+            <a:off x="0" y="0"/>
+            <a:ext cx="12192000" cy="1341120"/>
+          </a:xfrm>
+          <a:prstGeom prst="rect">
+            <a:avLst/>
+          </a:prstGeom>
+          <a:solidFill>
+            <a:srgbClr val="4A7C59"/>
+          </a:solidFill>
+          <a:ln/>
+        </p:spPr>
+        <p:txBody>
+          <a:bodyPr/>
+          <a:lstStyle/>
+          <a:p>
+            <a:endParaRPr lang="ko-KR" altLang="en-US" sz="2400"/>
+          </a:p>
+        </p:txBody>
+      </p:sp>
+      <p:sp>
+        <p:nvSpPr>
+          <p:cNvPr id="6" name="Text 1">
+            <a:extLst>
+              <a:ext uri="{FF2B5EF4-FFF2-40B4-BE49-F238E27FC236}">
+                <a16:creationId xmlns:a16="http://schemas.microsoft.com/office/drawing/2014/main" id="{5E750524-6E63-E923-850B-195BEDE9474A}"/>
+              </a:ext>
+            </a:extLst>
+          </p:cNvPr>
+          <p:cNvSpPr/>
+          <p:nvPr/>
+        </p:nvSpPr>
+        <p:spPr>
+          <a:xfrm>
+            <a:off x="609600" y="219456"/>
+            <a:ext cx="10972800" cy="914400"/>
+          </a:xfrm>
+          <a:prstGeom prst="rect">
+            <a:avLst/>
+          </a:prstGeom>
+          <a:noFill/>
+          <a:ln/>
+        </p:spPr>
+        <p:txBody>
+          <a:bodyPr wrap="square" rtlCol="0" anchor="ctr"/>
+          <a:lstStyle/>
+          <a:p>
+            <a:r>
+              <a:rPr lang="ko-KR" altLang="en-US" sz="3467" b="1" dirty="0">
+                <a:solidFill>
+                  <a:srgbClr val="FFFFFF"/>
+                </a:solidFill>
+                <a:latin typeface="Malgun Gothic" pitchFamily="34" charset="0"/>
+                <a:ea typeface="Malgun Gothic" pitchFamily="34" charset="-122"/>
+                <a:cs typeface="Malgun Gothic" pitchFamily="34" charset="-120"/>
+              </a:rPr>
+              <a:t>용서하는 방법</a:t>
+            </a:r>
+            <a:endParaRPr lang="en-US" sz="3467" dirty="0"/>
+          </a:p>
+        </p:txBody>
+      </p:sp>
+      <p:sp>
+        <p:nvSpPr>
+          <p:cNvPr id="9" name="TextBox 8">
+            <a:extLst>
+              <a:ext uri="{FF2B5EF4-FFF2-40B4-BE49-F238E27FC236}">
+                <a16:creationId xmlns:a16="http://schemas.microsoft.com/office/drawing/2014/main" id="{E23839D1-00BB-FA05-3884-0DC6733414E3}"/>
+              </a:ext>
+            </a:extLst>
+          </p:cNvPr>
+          <p:cNvSpPr txBox="1"/>
+          <p:nvPr/>
+        </p:nvSpPr>
+        <p:spPr>
+          <a:xfrm>
+            <a:off x="4367069" y="1762706"/>
+            <a:ext cx="7645718" cy="4210192"/>
+          </a:xfrm>
+          <a:prstGeom prst="rect">
+            <a:avLst/>
+          </a:prstGeom>
+          <a:noFill/>
+        </p:spPr>
+        <p:txBody>
+          <a:bodyPr wrap="square" rtlCol="0">
+            <a:spAutoFit/>
+          </a:bodyPr>
+          <a:lstStyle/>
+          <a:p>
+            <a:pPr marL="342900" indent="-342900">
+              <a:lnSpc>
+                <a:spcPct val="250000"/>
+              </a:lnSpc>
+              <a:buAutoNum type="arabicPeriod"/>
+            </a:pPr>
+            <a:r>
+              <a:rPr lang="ko-KR" altLang="en-US" sz="2800" dirty="0"/>
+              <a:t>침착하게 대응할 것</a:t>
+            </a:r>
+            <a:endParaRPr lang="en-US" altLang="ko-KR" sz="2800" dirty="0"/>
+          </a:p>
+          <a:p>
+            <a:pPr marL="342900" indent="-342900">
+              <a:lnSpc>
+                <a:spcPct val="250000"/>
+              </a:lnSpc>
+              <a:buAutoNum type="arabicPeriod"/>
+            </a:pPr>
+            <a:r>
+              <a:rPr lang="ko-KR" altLang="en-US" sz="2800" dirty="0"/>
+              <a:t>상대방이 왜 잘못을 저질렀는지 이해할 것</a:t>
+            </a:r>
+            <a:endParaRPr lang="en-US" altLang="ko-KR" sz="2800" dirty="0"/>
+          </a:p>
+          <a:p>
+            <a:pPr marL="342900" indent="-342900">
+              <a:lnSpc>
+                <a:spcPct val="250000"/>
+              </a:lnSpc>
+              <a:buAutoNum type="arabicPeriod"/>
+            </a:pPr>
+            <a:r>
+              <a:rPr lang="ko-KR" altLang="en-US" sz="2800" dirty="0"/>
+              <a:t>내가 받은 상처를 마주할 것</a:t>
+            </a:r>
+            <a:endParaRPr lang="en-US" altLang="ko-KR" sz="2800" dirty="0"/>
+          </a:p>
+          <a:p>
+            <a:pPr marL="342900" indent="-342900">
+              <a:lnSpc>
+                <a:spcPct val="250000"/>
+              </a:lnSpc>
+              <a:buAutoNum type="arabicPeriod"/>
+            </a:pPr>
+            <a:r>
+              <a:rPr lang="ko-KR" altLang="en-US" sz="2800" dirty="0"/>
+              <a:t>이 일에 대해서 잊을 것</a:t>
+            </a:r>
+            <a:endParaRPr lang="en-US" altLang="ko-KR" sz="2800" dirty="0"/>
+          </a:p>
+        </p:txBody>
+      </p:sp>
+      <p:pic>
+        <p:nvPicPr>
+          <p:cNvPr id="10" name="Picture 2" descr="너는 누구니: 빨간 옷 입은 외국 남자애가 아하! 하는 사진 : 네이버 블로그">
+            <a:extLst>
+              <a:ext uri="{FF2B5EF4-FFF2-40B4-BE49-F238E27FC236}">
+                <a16:creationId xmlns:a16="http://schemas.microsoft.com/office/drawing/2014/main" id="{E63B0DAC-927A-4237-38E4-BA339B18E67F}"/>
+              </a:ext>
+            </a:extLst>
+          </p:cNvPr>
+          <p:cNvPicPr>
+            <a:picLocks noChangeAspect="1" noChangeArrowheads="1"/>
+          </p:cNvPicPr>
+          <p:nvPr/>
+        </p:nvPicPr>
+        <p:blipFill>
+          <a:blip r:embed="rId3">
+            <a:extLst>
+              <a:ext uri="{BEBA8EAE-BF5A-486C-A8C5-ECC9F3942E4B}">
+                <a14:imgProps xmlns:a14="http://schemas.microsoft.com/office/drawing/2010/main">
+                  <a14:imgLayer r:embed="rId4">
+                    <a14:imgEffect>
+                      <a14:backgroundRemoval t="6489" b="99237" l="1563" r="99479">
+                        <a14:foregroundMark x1="32292" y1="9542" x2="56771" y2="4198"/>
+                        <a14:foregroundMark x1="56771" y1="4198" x2="75521" y2="9542"/>
+                        <a14:foregroundMark x1="75521" y1="9542" x2="76042" y2="11450"/>
+                        <a14:foregroundMark x1="36979" y1="6489" x2="55729" y2="763"/>
+                        <a14:foregroundMark x1="55729" y1="763" x2="68750" y2="6489"/>
+                        <a14:foregroundMark x1="68750" y1="6489" x2="69271" y2="6870"/>
+                        <a14:foregroundMark x1="26042" y1="40840" x2="521" y2="83206"/>
+                        <a14:foregroundMark x1="521" y1="83206" x2="2083" y2="95420"/>
+                        <a14:foregroundMark x1="2083" y1="95420" x2="5208" y2="99237"/>
+                        <a14:foregroundMark x1="40625" y1="51145" x2="32813" y2="53817"/>
+                        <a14:foregroundMark x1="68229" y1="51908" x2="85417" y2="56107"/>
+                        <a14:foregroundMark x1="85417" y1="56107" x2="99479" y2="65267"/>
+                        <a14:foregroundMark x1="46875" y1="43511" x2="55729" y2="44275"/>
+                      </a14:backgroundRemoval>
+                    </a14:imgEffect>
+                  </a14:imgLayer>
+                </a14:imgProps>
+              </a:ext>
+              <a:ext uri="{28A0092B-C50C-407E-A947-70E740481C1C}">
+                <a14:useLocalDpi xmlns:a14="http://schemas.microsoft.com/office/drawing/2010/main" val="0"/>
+              </a:ext>
+            </a:extLst>
+          </a:blip>
+          <a:srcRect/>
+          <a:stretch>
+            <a:fillRect/>
+          </a:stretch>
+        </p:blipFill>
+        <p:spPr bwMode="auto">
+          <a:xfrm>
+            <a:off x="609600" y="1854157"/>
+            <a:ext cx="3018314" cy="4118741"/>
+          </a:xfrm>
+          <a:prstGeom prst="rect">
+            <a:avLst/>
+          </a:prstGeom>
+          <a:noFill/>
+          <a:extLst>
+            <a:ext uri="{909E8E84-426E-40DD-AFC4-6F175D3DCCD1}">
+              <a14:hiddenFill xmlns:a14="http://schemas.microsoft.com/office/drawing/2010/main">
+                <a:solidFill>
+                  <a:srgbClr val="FFFFFF"/>
+                </a:solidFill>
+              </a14:hiddenFill>
+            </a:ext>
+          </a:extLst>
+        </p:spPr>
+      </p:pic>
+    </p:spTree>
+    <p:extLst>
+      <p:ext uri="{BB962C8B-B14F-4D97-AF65-F5344CB8AC3E}">
+        <p14:creationId xmlns:p14="http://schemas.microsoft.com/office/powerpoint/2010/main" val="2512427039"/>
+      </p:ext>
+    </p:extLst>
+  </p:cSld>
+  <p:clrMapOvr>
+    <a:masterClrMapping/>
+  </p:clrMapOvr>
+</p:sld>
+</file>
+
+<file path=ppt/slides/slide11.xml><?xml version="1.0" encoding="utf-8"?>
+<p:sld xmlns:a="http://schemas.openxmlformats.org/drawingml/2006/main" xmlns:r="http://schemas.openxmlformats.org/officeDocument/2006/relationships" xmlns:p="http://schemas.openxmlformats.org/presentationml/2006/main">
+  <p:cSld>
+    <p:spTree>
+      <p:nvGrpSpPr>
+        <p:cNvPr id="1" name="">
+          <a:extLst>
+            <a:ext uri="{FF2B5EF4-FFF2-40B4-BE49-F238E27FC236}">
+              <a16:creationId xmlns:a16="http://schemas.microsoft.com/office/drawing/2014/main" id="{A086AF62-E21C-BE96-4B18-5068A3AC9C2B}"/>
+            </a:ext>
+          </a:extLst>
+        </p:cNvPr>
+        <p:cNvGrpSpPr/>
+        <p:nvPr/>
+      </p:nvGrpSpPr>
+      <p:grpSpPr>
+        <a:xfrm>
+          <a:off x="0" y="0"/>
+          <a:ext cx="0" cy="0"/>
+          <a:chOff x="0" y="0"/>
+          <a:chExt cx="0" cy="0"/>
+        </a:xfrm>
+      </p:grpSpPr>
+      <p:sp>
+        <p:nvSpPr>
+          <p:cNvPr id="14" name="사각형: 둥근 모서리 13">
+            <a:extLst>
+              <a:ext uri="{FF2B5EF4-FFF2-40B4-BE49-F238E27FC236}">
+                <a16:creationId xmlns:a16="http://schemas.microsoft.com/office/drawing/2014/main" id="{424503DF-9404-BEDB-CB68-44E6DD35EB15}"/>
+              </a:ext>
+            </a:extLst>
+          </p:cNvPr>
+          <p:cNvSpPr/>
+          <p:nvPr/>
+        </p:nvSpPr>
+        <p:spPr>
+          <a:xfrm>
+            <a:off x="4562856" y="3310128"/>
+            <a:ext cx="7019544" cy="1341120"/>
+          </a:xfrm>
+          <a:prstGeom prst="roundRect">
+            <a:avLst/>
+          </a:prstGeom>
+          <a:solidFill>
+            <a:schemeClr val="accent6">
+              <a:lumMod val="20000"/>
+              <a:lumOff val="80000"/>
+            </a:schemeClr>
+          </a:solidFill>
+        </p:spPr>
+        <p:style>
+          <a:lnRef idx="2">
+            <a:schemeClr val="accent1">
+              <a:shade val="15000"/>
+            </a:schemeClr>
+          </a:lnRef>
+          <a:fillRef idx="1">
+            <a:schemeClr val="accent1"/>
+          </a:fillRef>
+          <a:effectRef idx="0">
+            <a:schemeClr val="accent1"/>
+          </a:effectRef>
+          <a:fontRef idx="minor">
+            <a:schemeClr val="lt1"/>
+          </a:fontRef>
+        </p:style>
+        <p:txBody>
+          <a:bodyPr rtlCol="0" anchor="ctr"/>
+          <a:lstStyle/>
+          <a:p>
+            <a:pPr algn="ctr"/>
+            <a:endParaRPr lang="ko-KR" altLang="en-US"/>
+          </a:p>
+        </p:txBody>
+      </p:sp>
+      <p:cxnSp>
+        <p:nvCxnSpPr>
+          <p:cNvPr id="3" name="직선 연결선 2">
+            <a:extLst>
+              <a:ext uri="{FF2B5EF4-FFF2-40B4-BE49-F238E27FC236}">
+                <a16:creationId xmlns:a16="http://schemas.microsoft.com/office/drawing/2014/main" id="{2907ED13-3081-D195-DDA7-5EF917F4C987}"/>
+              </a:ext>
+            </a:extLst>
+          </p:cNvPr>
+          <p:cNvCxnSpPr/>
+          <p:nvPr/>
+        </p:nvCxnSpPr>
+        <p:spPr>
+          <a:xfrm>
+            <a:off x="649224" y="1143000"/>
+            <a:ext cx="10981944" cy="0"/>
+          </a:xfrm>
+          <a:prstGeom prst="line">
+            <a:avLst/>
+          </a:prstGeom>
+          <a:ln>
+            <a:solidFill>
+              <a:schemeClr val="tx1"/>
+            </a:solidFill>
+          </a:ln>
+        </p:spPr>
+        <p:style>
+          <a:lnRef idx="2">
+            <a:schemeClr val="accent1"/>
+          </a:lnRef>
+          <a:fillRef idx="0">
+            <a:schemeClr val="accent1"/>
+          </a:fillRef>
+          <a:effectRef idx="1">
+            <a:schemeClr val="accent1"/>
+          </a:effectRef>
+          <a:fontRef idx="minor">
+            <a:schemeClr val="tx1"/>
+          </a:fontRef>
+        </p:style>
+      </p:cxnSp>
+      <p:sp>
+        <p:nvSpPr>
+          <p:cNvPr id="5" name="TextBox 4">
+            <a:extLst>
+              <a:ext uri="{FF2B5EF4-FFF2-40B4-BE49-F238E27FC236}">
+                <a16:creationId xmlns:a16="http://schemas.microsoft.com/office/drawing/2014/main" id="{F5D73DE8-DF1A-4D26-BFF5-185346A7E78A}"/>
+              </a:ext>
+            </a:extLst>
+          </p:cNvPr>
+          <p:cNvSpPr txBox="1"/>
+          <p:nvPr/>
+        </p:nvSpPr>
+        <p:spPr>
+          <a:xfrm>
+            <a:off x="713232" y="374903"/>
+            <a:ext cx="2679192" cy="646331"/>
+          </a:xfrm>
+          <a:prstGeom prst="rect">
+            <a:avLst/>
+          </a:prstGeom>
+          <a:noFill/>
+        </p:spPr>
+        <p:txBody>
+          <a:bodyPr wrap="square" rtlCol="0">
+            <a:spAutoFit/>
+          </a:bodyPr>
+          <a:lstStyle/>
+          <a:p>
+            <a:r>
+              <a:rPr lang="ko-KR" altLang="en-US" sz="3600" dirty="0"/>
+              <a:t>마무리 멘트</a:t>
+            </a:r>
+          </a:p>
+        </p:txBody>
+      </p:sp>
+      <p:sp>
+        <p:nvSpPr>
+          <p:cNvPr id="2" name="Shape 0">
+            <a:extLst>
+              <a:ext uri="{FF2B5EF4-FFF2-40B4-BE49-F238E27FC236}">
+                <a16:creationId xmlns:a16="http://schemas.microsoft.com/office/drawing/2014/main" id="{58D35909-E97C-099D-2736-3ACE62D216BD}"/>
+              </a:ext>
+            </a:extLst>
+          </p:cNvPr>
+          <p:cNvSpPr/>
+          <p:nvPr/>
+        </p:nvSpPr>
+        <p:spPr>
+          <a:xfrm>
+            <a:off x="0" y="0"/>
+            <a:ext cx="12192000" cy="1341120"/>
+          </a:xfrm>
+          <a:prstGeom prst="rect">
+            <a:avLst/>
+          </a:prstGeom>
+          <a:solidFill>
+            <a:srgbClr val="4A7C59"/>
+          </a:solidFill>
+          <a:ln/>
+        </p:spPr>
+        <p:txBody>
+          <a:bodyPr/>
+          <a:lstStyle/>
+          <a:p>
+            <a:endParaRPr lang="ko-KR" altLang="en-US" sz="2400"/>
+          </a:p>
+        </p:txBody>
+      </p:sp>
+      <p:sp>
+        <p:nvSpPr>
+          <p:cNvPr id="6" name="Text 1">
+            <a:extLst>
+              <a:ext uri="{FF2B5EF4-FFF2-40B4-BE49-F238E27FC236}">
+                <a16:creationId xmlns:a16="http://schemas.microsoft.com/office/drawing/2014/main" id="{C6D3BEF7-DAF2-BF8D-9F49-05037D8A7DE1}"/>
+              </a:ext>
+            </a:extLst>
+          </p:cNvPr>
+          <p:cNvSpPr/>
+          <p:nvPr/>
+        </p:nvSpPr>
+        <p:spPr>
+          <a:xfrm>
+            <a:off x="609600" y="219456"/>
+            <a:ext cx="10972800" cy="914400"/>
+          </a:xfrm>
+          <a:prstGeom prst="rect">
+            <a:avLst/>
+          </a:prstGeom>
+          <a:noFill/>
+          <a:ln/>
+        </p:spPr>
+        <p:txBody>
+          <a:bodyPr wrap="square" rtlCol="0" anchor="ctr"/>
+          <a:lstStyle/>
+          <a:p>
+            <a:r>
+              <a:rPr lang="ko-KR" altLang="en-US" sz="3467" b="1" dirty="0">
+                <a:solidFill>
+                  <a:srgbClr val="FFFFFF"/>
+                </a:solidFill>
+                <a:latin typeface="Malgun Gothic" pitchFamily="34" charset="0"/>
+                <a:ea typeface="Malgun Gothic" pitchFamily="34" charset="-122"/>
+              </a:rPr>
+              <a:t>마무리 멘트</a:t>
+            </a:r>
+            <a:endParaRPr lang="en-US" sz="3467" dirty="0"/>
+          </a:p>
+        </p:txBody>
+      </p:sp>
+      <p:pic>
+        <p:nvPicPr>
+          <p:cNvPr id="1026" name="Picture 2" descr="自助グループのイラスト（笑顔）">
+            <a:extLst>
+              <a:ext uri="{FF2B5EF4-FFF2-40B4-BE49-F238E27FC236}">
+                <a16:creationId xmlns:a16="http://schemas.microsoft.com/office/drawing/2014/main" id="{6571F1F4-6245-663C-4259-D22AE788CF84}"/>
+              </a:ext>
+            </a:extLst>
+          </p:cNvPr>
+          <p:cNvPicPr>
+            <a:picLocks noChangeAspect="1" noChangeArrowheads="1"/>
+          </p:cNvPicPr>
+          <p:nvPr/>
+        </p:nvPicPr>
+        <p:blipFill>
+          <a:blip r:embed="rId3">
+            <a:extLst>
+              <a:ext uri="{28A0092B-C50C-407E-A947-70E740481C1C}">
+                <a14:useLocalDpi xmlns:a14="http://schemas.microsoft.com/office/drawing/2010/main" val="0"/>
+              </a:ext>
+            </a:extLst>
+          </a:blip>
+          <a:srcRect/>
+          <a:stretch>
+            <a:fillRect/>
+          </a:stretch>
+        </p:blipFill>
+        <p:spPr bwMode="auto">
+          <a:xfrm>
+            <a:off x="466344" y="2276856"/>
+            <a:ext cx="3739896" cy="3739896"/>
+          </a:xfrm>
+          <a:prstGeom prst="rect">
+            <a:avLst/>
+          </a:prstGeom>
+          <a:noFill/>
+          <a:extLst>
+            <a:ext uri="{909E8E84-426E-40DD-AFC4-6F175D3DCCD1}">
+              <a14:hiddenFill xmlns:a14="http://schemas.microsoft.com/office/drawing/2010/main">
+                <a:solidFill>
+                  <a:srgbClr val="FFFFFF"/>
+                </a:solidFill>
+              </a14:hiddenFill>
+            </a:ext>
+          </a:extLst>
+        </p:spPr>
+      </p:pic>
+      <p:sp>
+        <p:nvSpPr>
+          <p:cNvPr id="4" name="TextBox 3">
+            <a:extLst>
+              <a:ext uri="{FF2B5EF4-FFF2-40B4-BE49-F238E27FC236}">
+                <a16:creationId xmlns:a16="http://schemas.microsoft.com/office/drawing/2014/main" id="{8355E158-EEE6-EA99-2B2D-CB4F7A7A901F}"/>
+              </a:ext>
+            </a:extLst>
+          </p:cNvPr>
+          <p:cNvSpPr txBox="1"/>
+          <p:nvPr/>
+        </p:nvSpPr>
+        <p:spPr>
+          <a:xfrm>
+            <a:off x="4636008" y="3429000"/>
+            <a:ext cx="7799832" cy="816955"/>
+          </a:xfrm>
+          <a:prstGeom prst="rect">
+            <a:avLst/>
+          </a:prstGeom>
+          <a:noFill/>
+        </p:spPr>
+        <p:txBody>
+          <a:bodyPr wrap="square" rtlCol="0">
+            <a:spAutoFit/>
+          </a:bodyPr>
+          <a:lstStyle/>
+          <a:p>
+            <a:pPr>
+              <a:lnSpc>
+                <a:spcPct val="200000"/>
+              </a:lnSpc>
+            </a:pPr>
+            <a:r>
+              <a:rPr lang="en-US" altLang="ko-KR" sz="2800" b="1" dirty="0"/>
+              <a:t>“</a:t>
+            </a:r>
+            <a:r>
+              <a:rPr lang="ko-KR" altLang="en-US" sz="2800" b="1" dirty="0"/>
+              <a:t>용서는 문제를 해결하는 가장 쉬운 방법</a:t>
+            </a:r>
+            <a:r>
+              <a:rPr lang="en-US" altLang="ko-KR" sz="2800" b="1" dirty="0"/>
+              <a:t>”</a:t>
+            </a:r>
+          </a:p>
+        </p:txBody>
+      </p:sp>
+    </p:spTree>
+    <p:extLst>
+      <p:ext uri="{BB962C8B-B14F-4D97-AF65-F5344CB8AC3E}">
+        <p14:creationId xmlns:p14="http://schemas.microsoft.com/office/powerpoint/2010/main" val="2512408432"/>
+      </p:ext>
+    </p:extLst>
+  </p:cSld>
+  <p:clrMapOvr>
+    <a:masterClrMapping/>
+  </p:clrMapOvr>
+</p:sld>
+</file>
+
+<file path=ppt/slides/slide12.xml><?xml version="1.0" encoding="utf-8"?>
+<p:sld xmlns:a="http://schemas.openxmlformats.org/drawingml/2006/main" xmlns:r="http://schemas.openxmlformats.org/officeDocument/2006/relationships" xmlns:p="http://schemas.openxmlformats.org/presentationml/2006/main">
+  <p:cSld>
+    <p:spTree>
+      <p:nvGrpSpPr>
         <p:cNvPr id="1" name="">
           <a:extLst>
             <a:ext uri="{FF2B5EF4-FFF2-40B4-BE49-F238E27FC236}">
@@ -6131,7 +7273,7 @@
 </p:sld>
 </file>
 
-<file path=ppt/slides/slide11.xml><?xml version="1.0" encoding="utf-8"?>
+<file path=ppt/slides/slide13.xml><?xml version="1.0" encoding="utf-8"?>
 <p:sld xmlns:a="http://schemas.openxmlformats.org/drawingml/2006/main" xmlns:r="http://schemas.openxmlformats.org/officeDocument/2006/relationships" xmlns:p="http://schemas.openxmlformats.org/presentationml/2006/main">
   <p:cSld>
     <p:spTree>
@@ -6497,7 +7639,7 @@
 </p:sld>
 </file>
 
-<file path=ppt/slides/slide12.xml><?xml version="1.0" encoding="utf-8"?>
+<file path=ppt/slides/slide14.xml><?xml version="1.0" encoding="utf-8"?>
 <p:sld xmlns:a="http://schemas.openxmlformats.org/drawingml/2006/main" xmlns:r="http://schemas.openxmlformats.org/officeDocument/2006/relationships" xmlns:p="http://schemas.openxmlformats.org/presentationml/2006/main">
   <p:cSld>
     <p:spTree>
@@ -9217,6 +10359,1294 @@
   <p:cSld>
     <p:spTree>
       <p:nvGrpSpPr>
+        <p:cNvPr id="1" name="">
+          <a:extLst>
+            <a:ext uri="{FF2B5EF4-FFF2-40B4-BE49-F238E27FC236}">
+              <a16:creationId xmlns:a16="http://schemas.microsoft.com/office/drawing/2014/main" id="{AFFA8485-7CE0-FD20-3BA9-C46E6DCBCAAA}"/>
+            </a:ext>
+          </a:extLst>
+        </p:cNvPr>
+        <p:cNvGrpSpPr/>
+        <p:nvPr/>
+      </p:nvGrpSpPr>
+      <p:grpSpPr>
+        <a:xfrm>
+          <a:off x="0" y="0"/>
+          <a:ext cx="0" cy="0"/>
+          <a:chOff x="0" y="0"/>
+          <a:chExt cx="0" cy="0"/>
+        </a:xfrm>
+      </p:grpSpPr>
+      <p:cxnSp>
+        <p:nvCxnSpPr>
+          <p:cNvPr id="3" name="직선 연결선 2">
+            <a:extLst>
+              <a:ext uri="{FF2B5EF4-FFF2-40B4-BE49-F238E27FC236}">
+                <a16:creationId xmlns:a16="http://schemas.microsoft.com/office/drawing/2014/main" id="{F74D059C-02F1-BEE0-8011-69185AA8CCFD}"/>
+              </a:ext>
+            </a:extLst>
+          </p:cNvPr>
+          <p:cNvCxnSpPr/>
+          <p:nvPr/>
+        </p:nvCxnSpPr>
+        <p:spPr>
+          <a:xfrm>
+            <a:off x="649224" y="1143000"/>
+            <a:ext cx="10981944" cy="0"/>
+          </a:xfrm>
+          <a:prstGeom prst="line">
+            <a:avLst/>
+          </a:prstGeom>
+          <a:ln>
+            <a:solidFill>
+              <a:schemeClr val="tx1"/>
+            </a:solidFill>
+          </a:ln>
+        </p:spPr>
+        <p:style>
+          <a:lnRef idx="2">
+            <a:schemeClr val="accent1"/>
+          </a:lnRef>
+          <a:fillRef idx="0">
+            <a:schemeClr val="accent1"/>
+          </a:fillRef>
+          <a:effectRef idx="1">
+            <a:schemeClr val="accent1"/>
+          </a:effectRef>
+          <a:fontRef idx="minor">
+            <a:schemeClr val="tx1"/>
+          </a:fontRef>
+        </p:style>
+      </p:cxnSp>
+      <p:sp>
+        <p:nvSpPr>
+          <p:cNvPr id="5" name="TextBox 4">
+            <a:extLst>
+              <a:ext uri="{FF2B5EF4-FFF2-40B4-BE49-F238E27FC236}">
+                <a16:creationId xmlns:a16="http://schemas.microsoft.com/office/drawing/2014/main" id="{F4E95140-02D7-6BCB-1650-2C2944BBB5E1}"/>
+              </a:ext>
+            </a:extLst>
+          </p:cNvPr>
+          <p:cNvSpPr txBox="1"/>
+          <p:nvPr/>
+        </p:nvSpPr>
+        <p:spPr>
+          <a:xfrm>
+            <a:off x="713232" y="374903"/>
+            <a:ext cx="2679192" cy="646331"/>
+          </a:xfrm>
+          <a:prstGeom prst="rect">
+            <a:avLst/>
+          </a:prstGeom>
+          <a:noFill/>
+        </p:spPr>
+        <p:txBody>
+          <a:bodyPr wrap="square" rtlCol="0">
+            <a:spAutoFit/>
+          </a:bodyPr>
+          <a:lstStyle/>
+          <a:p>
+            <a:r>
+              <a:rPr lang="ko-KR" altLang="en-US" sz="3600" dirty="0"/>
+              <a:t>마무리 멘트</a:t>
+            </a:r>
+          </a:p>
+        </p:txBody>
+      </p:sp>
+      <p:sp>
+        <p:nvSpPr>
+          <p:cNvPr id="2" name="Shape 0">
+            <a:extLst>
+              <a:ext uri="{FF2B5EF4-FFF2-40B4-BE49-F238E27FC236}">
+                <a16:creationId xmlns:a16="http://schemas.microsoft.com/office/drawing/2014/main" id="{C6287624-B030-A189-CB19-21610B45C3E8}"/>
+              </a:ext>
+            </a:extLst>
+          </p:cNvPr>
+          <p:cNvSpPr/>
+          <p:nvPr/>
+        </p:nvSpPr>
+        <p:spPr>
+          <a:xfrm>
+            <a:off x="0" y="0"/>
+            <a:ext cx="12192000" cy="1341120"/>
+          </a:xfrm>
+          <a:prstGeom prst="rect">
+            <a:avLst/>
+          </a:prstGeom>
+          <a:solidFill>
+            <a:srgbClr val="4A7C59"/>
+          </a:solidFill>
+          <a:ln/>
+        </p:spPr>
+        <p:txBody>
+          <a:bodyPr/>
+          <a:lstStyle/>
+          <a:p>
+            <a:endParaRPr lang="ko-KR" altLang="en-US" sz="2400"/>
+          </a:p>
+        </p:txBody>
+      </p:sp>
+      <p:sp>
+        <p:nvSpPr>
+          <p:cNvPr id="6" name="Text 1">
+            <a:extLst>
+              <a:ext uri="{FF2B5EF4-FFF2-40B4-BE49-F238E27FC236}">
+                <a16:creationId xmlns:a16="http://schemas.microsoft.com/office/drawing/2014/main" id="{0F9EED2F-3157-AD07-70A7-9E14F5B2F718}"/>
+              </a:ext>
+            </a:extLst>
+          </p:cNvPr>
+          <p:cNvSpPr/>
+          <p:nvPr/>
+        </p:nvSpPr>
+        <p:spPr>
+          <a:xfrm>
+            <a:off x="609600" y="219456"/>
+            <a:ext cx="10972800" cy="914400"/>
+          </a:xfrm>
+          <a:prstGeom prst="rect">
+            <a:avLst/>
+          </a:prstGeom>
+          <a:noFill/>
+          <a:ln/>
+        </p:spPr>
+        <p:txBody>
+          <a:bodyPr wrap="square" rtlCol="0" anchor="ctr"/>
+          <a:lstStyle/>
+          <a:p>
+            <a:r>
+              <a:rPr lang="en-US" altLang="ko-KR" sz="3467" b="1" dirty="0">
+                <a:solidFill>
+                  <a:srgbClr val="FFFFFF"/>
+                </a:solidFill>
+                <a:latin typeface="Malgun Gothic" pitchFamily="34" charset="0"/>
+                <a:ea typeface="Malgun Gothic" pitchFamily="34" charset="-122"/>
+              </a:rPr>
+              <a:t>SOF</a:t>
+            </a:r>
+            <a:endParaRPr lang="en-US" sz="3467" dirty="0"/>
+          </a:p>
+        </p:txBody>
+      </p:sp>
+      <p:sp>
+        <p:nvSpPr>
+          <p:cNvPr id="4" name="Shape 4">
+            <a:extLst>
+              <a:ext uri="{FF2B5EF4-FFF2-40B4-BE49-F238E27FC236}">
+                <a16:creationId xmlns:a16="http://schemas.microsoft.com/office/drawing/2014/main" id="{D25CAF59-B5F0-9FB8-C0E4-21F453001750}"/>
+              </a:ext>
+            </a:extLst>
+          </p:cNvPr>
+          <p:cNvSpPr/>
+          <p:nvPr/>
+        </p:nvSpPr>
+        <p:spPr>
+          <a:xfrm>
+            <a:off x="179672" y="1633086"/>
+            <a:ext cx="11832656" cy="5005458"/>
+          </a:xfrm>
+          <a:prstGeom prst="rect">
+            <a:avLst/>
+          </a:prstGeom>
+          <a:solidFill>
+            <a:srgbClr val="EAF2EF"/>
+          </a:solidFill>
+          <a:ln/>
+        </p:spPr>
+        <p:txBody>
+          <a:bodyPr/>
+          <a:lstStyle/>
+          <a:p>
+            <a:endParaRPr lang="ko-KR" altLang="en-US" sz="2400"/>
+          </a:p>
+        </p:txBody>
+      </p:sp>
+      <p:pic>
+        <p:nvPicPr>
+          <p:cNvPr id="1026" name="Picture 2" descr="怒る女性のイラスト（5段階） | かわいいフリー素材集 いらすとや">
+            <a:extLst>
+              <a:ext uri="{FF2B5EF4-FFF2-40B4-BE49-F238E27FC236}">
+                <a16:creationId xmlns:a16="http://schemas.microsoft.com/office/drawing/2014/main" id="{C010AF8B-2810-D0B5-8980-76C30E612470}"/>
+              </a:ext>
+            </a:extLst>
+          </p:cNvPr>
+          <p:cNvPicPr>
+            <a:picLocks noChangeAspect="1" noChangeArrowheads="1"/>
+          </p:cNvPicPr>
+          <p:nvPr/>
+        </p:nvPicPr>
+        <p:blipFill>
+          <a:blip r:embed="rId3">
+            <a:extLst>
+              <a:ext uri="{28A0092B-C50C-407E-A947-70E740481C1C}">
+                <a14:useLocalDpi xmlns:a14="http://schemas.microsoft.com/office/drawing/2010/main" val="0"/>
+              </a:ext>
+            </a:extLst>
+          </a:blip>
+          <a:srcRect/>
+          <a:stretch>
+            <a:fillRect/>
+          </a:stretch>
+        </p:blipFill>
+        <p:spPr bwMode="auto">
+          <a:xfrm>
+            <a:off x="713232" y="3284871"/>
+            <a:ext cx="1952510" cy="2640441"/>
+          </a:xfrm>
+          <a:prstGeom prst="rect">
+            <a:avLst/>
+          </a:prstGeom>
+          <a:noFill/>
+          <a:extLst>
+            <a:ext uri="{909E8E84-426E-40DD-AFC4-6F175D3DCCD1}">
+              <a14:hiddenFill xmlns:a14="http://schemas.microsoft.com/office/drawing/2010/main">
+                <a:solidFill>
+                  <a:srgbClr val="FFFFFF"/>
+                </a:solidFill>
+              </a14:hiddenFill>
+            </a:ext>
+          </a:extLst>
+        </p:spPr>
+      </p:pic>
+      <p:sp>
+        <p:nvSpPr>
+          <p:cNvPr id="7" name="말풍선: 모서리가 둥근 사각형 6">
+            <a:extLst>
+              <a:ext uri="{FF2B5EF4-FFF2-40B4-BE49-F238E27FC236}">
+                <a16:creationId xmlns:a16="http://schemas.microsoft.com/office/drawing/2014/main" id="{71A533E5-C5E2-026D-4630-FC452E83F092}"/>
+              </a:ext>
+            </a:extLst>
+          </p:cNvPr>
+          <p:cNvSpPr/>
+          <p:nvPr/>
+        </p:nvSpPr>
+        <p:spPr>
+          <a:xfrm>
+            <a:off x="2816352" y="1871472"/>
+            <a:ext cx="4315968" cy="2441448"/>
+          </a:xfrm>
+          <a:prstGeom prst="wedgeRoundRectCallout">
+            <a:avLst>
+              <a:gd name="adj1" fmla="val -44923"/>
+              <a:gd name="adj2" fmla="val 63782"/>
+              <a:gd name="adj3" fmla="val 16667"/>
+            </a:avLst>
+          </a:prstGeom>
+          <a:solidFill>
+            <a:schemeClr val="accent1">
+              <a:lumMod val="20000"/>
+              <a:lumOff val="80000"/>
+            </a:schemeClr>
+          </a:solidFill>
+        </p:spPr>
+        <p:style>
+          <a:lnRef idx="2">
+            <a:schemeClr val="accent1">
+              <a:shade val="15000"/>
+            </a:schemeClr>
+          </a:lnRef>
+          <a:fillRef idx="1">
+            <a:schemeClr val="accent1"/>
+          </a:fillRef>
+          <a:effectRef idx="0">
+            <a:schemeClr val="accent1"/>
+          </a:effectRef>
+          <a:fontRef idx="minor">
+            <a:schemeClr val="lt1"/>
+          </a:fontRef>
+        </p:style>
+        <p:txBody>
+          <a:bodyPr rtlCol="0" anchor="ctr"/>
+          <a:lstStyle/>
+          <a:p>
+            <a:pPr algn="ctr">
+              <a:lnSpc>
+                <a:spcPct val="150000"/>
+              </a:lnSpc>
+            </a:pPr>
+            <a:r>
+              <a:rPr lang="ko-KR" altLang="en-US" sz="2000" dirty="0">
+                <a:solidFill>
+                  <a:sysClr val="windowText" lastClr="000000"/>
+                </a:solidFill>
+              </a:rPr>
+              <a:t>어</a:t>
+            </a:r>
+            <a:r>
+              <a:rPr lang="en-US" altLang="ko-KR" sz="2000" dirty="0">
+                <a:solidFill>
+                  <a:sysClr val="windowText" lastClr="000000"/>
+                </a:solidFill>
+              </a:rPr>
+              <a:t>, </a:t>
+            </a:r>
+            <a:r>
+              <a:rPr lang="ko-KR" altLang="en-US" sz="2000" dirty="0">
+                <a:solidFill>
+                  <a:sysClr val="windowText" lastClr="000000"/>
+                </a:solidFill>
+              </a:rPr>
+              <a:t>자기야</a:t>
+            </a:r>
+            <a:r>
+              <a:rPr lang="en-US" altLang="ko-KR" sz="2000" dirty="0">
+                <a:solidFill>
+                  <a:sysClr val="windowText" lastClr="000000"/>
+                </a:solidFill>
+              </a:rPr>
+              <a:t>. </a:t>
+            </a:r>
+            <a:r>
+              <a:rPr lang="ko-KR" altLang="en-US" sz="2000" dirty="0">
+                <a:solidFill>
+                  <a:sysClr val="windowText" lastClr="000000"/>
+                </a:solidFill>
+              </a:rPr>
+              <a:t>이제 연락되네</a:t>
+            </a:r>
+            <a:r>
+              <a:rPr lang="en-US" altLang="ko-KR" sz="2000" dirty="0">
+                <a:solidFill>
+                  <a:sysClr val="windowText" lastClr="000000"/>
+                </a:solidFill>
+              </a:rPr>
+              <a:t>? </a:t>
+            </a:r>
+          </a:p>
+          <a:p>
+            <a:pPr algn="ctr">
+              <a:lnSpc>
+                <a:spcPct val="150000"/>
+              </a:lnSpc>
+            </a:pPr>
+            <a:r>
+              <a:rPr lang="ko-KR" altLang="en-US" sz="2000" dirty="0" err="1">
+                <a:solidFill>
+                  <a:sysClr val="windowText" lastClr="000000"/>
+                </a:solidFill>
+              </a:rPr>
+              <a:t>친구들이랑</a:t>
+            </a:r>
+            <a:r>
+              <a:rPr lang="ko-KR" altLang="en-US" sz="2000" dirty="0">
+                <a:solidFill>
+                  <a:sysClr val="windowText" lastClr="000000"/>
+                </a:solidFill>
+              </a:rPr>
+              <a:t> 재밌게 논다더니</a:t>
+            </a:r>
+            <a:r>
+              <a:rPr lang="en-US" altLang="ko-KR" sz="2000" dirty="0">
+                <a:solidFill>
+                  <a:sysClr val="windowText" lastClr="000000"/>
+                </a:solidFill>
+              </a:rPr>
+              <a:t>... </a:t>
+            </a:r>
+          </a:p>
+          <a:p>
+            <a:pPr algn="ctr">
+              <a:lnSpc>
+                <a:spcPct val="150000"/>
+              </a:lnSpc>
+            </a:pPr>
+            <a:r>
+              <a:rPr lang="ko-KR" altLang="en-US" sz="2000" dirty="0" err="1">
+                <a:solidFill>
+                  <a:sysClr val="windowText" lastClr="000000"/>
+                </a:solidFill>
+              </a:rPr>
+              <a:t>과팅</a:t>
+            </a:r>
+            <a:r>
+              <a:rPr lang="ko-KR" altLang="en-US" sz="2000" dirty="0">
+                <a:solidFill>
+                  <a:sysClr val="windowText" lastClr="000000"/>
+                </a:solidFill>
+              </a:rPr>
+              <a:t> 나갔다는 얘기가 </a:t>
+            </a:r>
+            <a:endParaRPr lang="en-US" altLang="ko-KR" sz="2000" dirty="0">
+              <a:solidFill>
+                <a:sysClr val="windowText" lastClr="000000"/>
+              </a:solidFill>
+            </a:endParaRPr>
+          </a:p>
+          <a:p>
+            <a:pPr algn="ctr">
+              <a:lnSpc>
+                <a:spcPct val="150000"/>
+              </a:lnSpc>
+            </a:pPr>
+            <a:r>
+              <a:rPr lang="ko-KR" altLang="en-US" sz="2000" dirty="0">
+                <a:solidFill>
+                  <a:sysClr val="windowText" lastClr="000000"/>
+                </a:solidFill>
+              </a:rPr>
+              <a:t>내 귀에까지</a:t>
+            </a:r>
+            <a:r>
+              <a:rPr lang="en-US" altLang="ko-KR" sz="2000" dirty="0">
+                <a:solidFill>
+                  <a:sysClr val="windowText" lastClr="000000"/>
+                </a:solidFill>
+              </a:rPr>
+              <a:t> </a:t>
+            </a:r>
+            <a:r>
+              <a:rPr lang="ko-KR" altLang="en-US" sz="2000" dirty="0">
+                <a:solidFill>
+                  <a:sysClr val="windowText" lastClr="000000"/>
+                </a:solidFill>
+              </a:rPr>
+              <a:t>들리게 해</a:t>
+            </a:r>
+            <a:r>
+              <a:rPr lang="en-US" altLang="ko-KR" sz="2000" dirty="0">
+                <a:solidFill>
+                  <a:sysClr val="windowText" lastClr="000000"/>
+                </a:solidFill>
+              </a:rPr>
+              <a:t>?</a:t>
+            </a:r>
+            <a:endParaRPr lang="ko-KR" altLang="en-US" sz="2000" dirty="0">
+              <a:solidFill>
+                <a:sysClr val="windowText" lastClr="000000"/>
+              </a:solidFill>
+            </a:endParaRPr>
+          </a:p>
+        </p:txBody>
+      </p:sp>
+      <p:grpSp>
+        <p:nvGrpSpPr>
+          <p:cNvPr id="8" name="그룹 7">
+            <a:extLst>
+              <a:ext uri="{FF2B5EF4-FFF2-40B4-BE49-F238E27FC236}">
+                <a16:creationId xmlns:a16="http://schemas.microsoft.com/office/drawing/2014/main" id="{1D434BE8-ECDE-F41E-A0A5-363FA6FF891B}"/>
+              </a:ext>
+            </a:extLst>
+          </p:cNvPr>
+          <p:cNvGrpSpPr/>
+          <p:nvPr/>
+        </p:nvGrpSpPr>
+        <p:grpSpPr>
+          <a:xfrm>
+            <a:off x="4139184" y="1871472"/>
+            <a:ext cx="7829730" cy="4399138"/>
+            <a:chOff x="4139184" y="1871472"/>
+            <a:chExt cx="7829730" cy="4399138"/>
+          </a:xfrm>
+        </p:grpSpPr>
+        <p:pic>
+          <p:nvPicPr>
+            <p:cNvPr id="16" name="그림 15">
+              <a:extLst>
+                <a:ext uri="{FF2B5EF4-FFF2-40B4-BE49-F238E27FC236}">
+                  <a16:creationId xmlns:a16="http://schemas.microsoft.com/office/drawing/2014/main" id="{36B7BC14-90B2-9DEF-B8EC-58A02F39E676}"/>
+                </a:ext>
+              </a:extLst>
+            </p:cNvPr>
+            <p:cNvPicPr>
+              <a:picLocks noChangeAspect="1"/>
+            </p:cNvPicPr>
+            <p:nvPr/>
+          </p:nvPicPr>
+          <p:blipFill>
+            <a:blip r:embed="rId4">
+              <a:extLst>
+                <a:ext uri="{BEBA8EAE-BF5A-486C-A8C5-ECC9F3942E4B}">
+                  <a14:imgProps xmlns:a14="http://schemas.microsoft.com/office/drawing/2010/main">
+                    <a14:imgLayer r:embed="rId5">
+                      <a14:imgEffect>
+                        <a14:backgroundRemoval t="0" b="99480" l="9961" r="98828">
+                          <a14:foregroundMark x1="39063" y1="9185" x2="41406" y2="0"/>
+                          <a14:foregroundMark x1="43164" y1="68458" x2="42330" y2="68930"/>
+                          <a14:foregroundMark x1="16979" y1="98752" x2="16797" y2="99653"/>
+                          <a14:foregroundMark x1="89258" y1="76430" x2="96973" y2="93934"/>
+                          <a14:foregroundMark x1="96973" y1="93934" x2="98828" y2="95147"/>
+                          <a14:foregroundMark x1="23460" y1="84617" x2="23903" y2="83538"/>
+                          <a14:foregroundMark x1="43214" y1="72916" x2="44531" y2="72444"/>
+                          <a14:foregroundMark x1="26334" y1="82495" x2="22768" y2="89224"/>
+                          <a14:foregroundMark x1="43750" y1="69671" x2="25391" y2="77990"/>
+                          <a14:foregroundMark x1="25391" y1="77990" x2="17578" y2="99307"/>
+                          <a14:backgroundMark x1="17090" y1="99133" x2="17164" y2="98884"/>
+                          <a14:backgroundMark x1="20898" y1="81109" x2="20281" y2="83833"/>
+                          <a14:backgroundMark x1="22110" y1="78844" x2="20605" y2="81802"/>
+                          <a14:backgroundMark x1="24092" y1="74946" x2="23518" y2="76074"/>
+                        </a14:backgroundRemoval>
+                      </a14:imgEffect>
+                    </a14:imgLayer>
+                  </a14:imgProps>
+                </a:ext>
+              </a:extLst>
+            </a:blip>
+            <a:stretch>
+              <a:fillRect/>
+            </a:stretch>
+          </p:blipFill>
+          <p:spPr>
+            <a:xfrm>
+              <a:off x="7282930" y="3630168"/>
+              <a:ext cx="4685984" cy="2640442"/>
+            </a:xfrm>
+            <a:prstGeom prst="rect">
+              <a:avLst/>
+            </a:prstGeom>
+          </p:spPr>
+        </p:pic>
+        <p:sp>
+          <p:nvSpPr>
+            <p:cNvPr id="17" name="말풍선: 모서리가 둥근 사각형 16">
+              <a:extLst>
+                <a:ext uri="{FF2B5EF4-FFF2-40B4-BE49-F238E27FC236}">
+                  <a16:creationId xmlns:a16="http://schemas.microsoft.com/office/drawing/2014/main" id="{F2385072-DEB3-E9E8-EFDD-673BC2D3ACE6}"/>
+                </a:ext>
+              </a:extLst>
+            </p:cNvPr>
+            <p:cNvSpPr/>
+            <p:nvPr/>
+          </p:nvSpPr>
+          <p:spPr>
+            <a:xfrm>
+              <a:off x="4139184" y="1871472"/>
+              <a:ext cx="4315968" cy="2441448"/>
+            </a:xfrm>
+            <a:prstGeom prst="wedgeRoundRectCallout">
+              <a:avLst>
+                <a:gd name="adj1" fmla="val 48085"/>
+                <a:gd name="adj2" fmla="val 69025"/>
+                <a:gd name="adj3" fmla="val 16667"/>
+              </a:avLst>
+            </a:prstGeom>
+            <a:solidFill>
+              <a:schemeClr val="accent6">
+                <a:lumMod val="20000"/>
+                <a:lumOff val="80000"/>
+              </a:schemeClr>
+            </a:solidFill>
+          </p:spPr>
+          <p:style>
+            <a:lnRef idx="2">
+              <a:schemeClr val="accent1">
+                <a:shade val="15000"/>
+              </a:schemeClr>
+            </a:lnRef>
+            <a:fillRef idx="1">
+              <a:schemeClr val="accent1"/>
+            </a:fillRef>
+            <a:effectRef idx="0">
+              <a:schemeClr val="accent1"/>
+            </a:effectRef>
+            <a:fontRef idx="minor">
+              <a:schemeClr val="lt1"/>
+            </a:fontRef>
+          </p:style>
+          <p:txBody>
+            <a:bodyPr rtlCol="0" anchor="ctr"/>
+            <a:lstStyle/>
+            <a:p>
+              <a:pPr algn="ctr">
+                <a:lnSpc>
+                  <a:spcPct val="150000"/>
+                </a:lnSpc>
+              </a:pPr>
+              <a:r>
+                <a:rPr lang="ko-KR" altLang="en-US" sz="2000" dirty="0">
+                  <a:solidFill>
+                    <a:schemeClr val="tx1"/>
+                  </a:solidFill>
+                </a:rPr>
+                <a:t>미안해</a:t>
+              </a:r>
+              <a:r>
+                <a:rPr lang="en-US" altLang="ko-KR" sz="2000" dirty="0">
+                  <a:solidFill>
+                    <a:schemeClr val="tx1"/>
+                  </a:solidFill>
+                </a:rPr>
+                <a:t>...</a:t>
+              </a:r>
+              <a:r>
+                <a:rPr lang="ko-KR" altLang="en-US" sz="2000" dirty="0">
+                  <a:solidFill>
+                    <a:schemeClr val="tx1"/>
+                  </a:solidFill>
+                </a:rPr>
+                <a:t>내 </a:t>
+              </a:r>
+              <a:r>
+                <a:rPr lang="en-US" altLang="ko-KR" sz="2000" dirty="0">
+                  <a:solidFill>
+                    <a:schemeClr val="tx1"/>
+                  </a:solidFill>
+                </a:rPr>
+                <a:t>23</a:t>
+              </a:r>
+              <a:r>
+                <a:rPr lang="ko-KR" altLang="en-US" sz="2000" dirty="0">
+                  <a:solidFill>
+                    <a:schemeClr val="tx1"/>
+                  </a:solidFill>
+                </a:rPr>
+                <a:t>년 </a:t>
+              </a:r>
+              <a:r>
+                <a:rPr lang="ko-KR" altLang="en-US" sz="2000" dirty="0" err="1">
+                  <a:solidFill>
+                    <a:schemeClr val="tx1"/>
+                  </a:solidFill>
+                </a:rPr>
+                <a:t>모솔</a:t>
+              </a:r>
+              <a:r>
+                <a:rPr lang="ko-KR" altLang="en-US" sz="2000" dirty="0">
+                  <a:solidFill>
+                    <a:schemeClr val="tx1"/>
+                  </a:solidFill>
+                </a:rPr>
+                <a:t> 친구들이 </a:t>
+              </a:r>
+              <a:endParaRPr lang="en-US" altLang="ko-KR" sz="2000" dirty="0">
+                <a:solidFill>
+                  <a:schemeClr val="tx1"/>
+                </a:solidFill>
+              </a:endParaRPr>
+            </a:p>
+            <a:p>
+              <a:pPr algn="ctr">
+                <a:lnSpc>
+                  <a:spcPct val="150000"/>
+                </a:lnSpc>
+              </a:pPr>
+              <a:r>
+                <a:rPr lang="ko-KR" altLang="en-US" sz="2000" dirty="0">
+                  <a:solidFill>
+                    <a:schemeClr val="tx1"/>
+                  </a:solidFill>
+                </a:rPr>
+                <a:t>자리만 채워달라고 해서 </a:t>
+              </a:r>
+              <a:endParaRPr lang="en-US" altLang="ko-KR" sz="2000" dirty="0">
+                <a:solidFill>
+                  <a:schemeClr val="tx1"/>
+                </a:solidFill>
+              </a:endParaRPr>
+            </a:p>
+            <a:p>
+              <a:pPr algn="ctr">
+                <a:lnSpc>
+                  <a:spcPct val="150000"/>
+                </a:lnSpc>
+              </a:pPr>
+              <a:r>
+                <a:rPr lang="ko-KR" altLang="en-US" sz="2000" dirty="0">
+                  <a:solidFill>
+                    <a:schemeClr val="tx1"/>
+                  </a:solidFill>
+                </a:rPr>
+                <a:t>어쩔 수 없었어</a:t>
+              </a:r>
+            </a:p>
+          </p:txBody>
+        </p:sp>
+      </p:grpSp>
+    </p:spTree>
+    <p:extLst>
+      <p:ext uri="{BB962C8B-B14F-4D97-AF65-F5344CB8AC3E}">
+        <p14:creationId xmlns:p14="http://schemas.microsoft.com/office/powerpoint/2010/main" val="1441294880"/>
+      </p:ext>
+    </p:extLst>
+  </p:cSld>
+  <p:clrMapOvr>
+    <a:masterClrMapping/>
+  </p:clrMapOvr>
+  <p:timing>
+    <p:tnLst>
+      <p:par>
+        <p:cTn id="1" dur="indefinite" restart="never" nodeType="tmRoot">
+          <p:childTnLst>
+            <p:seq concurrent="1" nextAc="seek">
+              <p:cTn id="2" dur="indefinite" nodeType="mainSeq">
+                <p:childTnLst>
+                  <p:par>
+                    <p:cTn id="3" fill="hold">
+                      <p:stCondLst>
+                        <p:cond delay="indefinite"/>
+                        <p:cond evt="onBegin" delay="0">
+                          <p:tn val="2"/>
+                        </p:cond>
+                      </p:stCondLst>
+                      <p:childTnLst>
+                        <p:par>
+                          <p:cTn id="4" fill="hold">
+                            <p:stCondLst>
+                              <p:cond delay="0"/>
+                            </p:stCondLst>
+                            <p:childTnLst>
+                              <p:par>
+                                <p:cTn id="5" presetID="1" presetClass="exit" presetSubtype="0" fill="hold" nodeType="withEffect">
+                                  <p:stCondLst>
+                                    <p:cond delay="0"/>
+                                  </p:stCondLst>
+                                  <p:childTnLst>
+                                    <p:set>
+                                      <p:cBhvr>
+                                        <p:cTn id="6" dur="1" fill="hold">
+                                          <p:stCondLst>
+                                            <p:cond delay="0"/>
+                                          </p:stCondLst>
+                                        </p:cTn>
+                                        <p:tgtEl>
+                                          <p:spTgt spid="8"/>
+                                        </p:tgtEl>
+                                        <p:attrNameLst>
+                                          <p:attrName>style.visibility</p:attrName>
+                                        </p:attrNameLst>
+                                      </p:cBhvr>
+                                      <p:to>
+                                        <p:strVal val="hidden"/>
+                                      </p:to>
+                                    </p:set>
+                                  </p:childTnLst>
+                                </p:cTn>
+                              </p:par>
+                            </p:childTnLst>
+                          </p:cTn>
+                        </p:par>
+                      </p:childTnLst>
+                    </p:cTn>
+                  </p:par>
+                  <p:par>
+                    <p:cTn id="7" fill="hold">
+                      <p:stCondLst>
+                        <p:cond delay="indefinite"/>
+                      </p:stCondLst>
+                      <p:childTnLst>
+                        <p:par>
+                          <p:cTn id="8" fill="hold">
+                            <p:stCondLst>
+                              <p:cond delay="0"/>
+                            </p:stCondLst>
+                            <p:childTnLst>
+                              <p:par>
+                                <p:cTn id="9" presetID="1" presetClass="entr" presetSubtype="0" fill="hold" nodeType="clickEffect">
+                                  <p:stCondLst>
+                                    <p:cond delay="0"/>
+                                  </p:stCondLst>
+                                  <p:childTnLst>
+                                    <p:set>
+                                      <p:cBhvr>
+                                        <p:cTn id="10" dur="1" fill="hold">
+                                          <p:stCondLst>
+                                            <p:cond delay="0"/>
+                                          </p:stCondLst>
+                                        </p:cTn>
+                                        <p:tgtEl>
+                                          <p:spTgt spid="8"/>
+                                        </p:tgtEl>
+                                        <p:attrNameLst>
+                                          <p:attrName>style.visibility</p:attrName>
+                                        </p:attrNameLst>
+                                      </p:cBhvr>
+                                      <p:to>
+                                        <p:strVal val="visible"/>
+                                      </p:to>
+                                    </p:set>
+                                  </p:childTnLst>
+                                </p:cTn>
+                              </p:par>
+                            </p:childTnLst>
+                          </p:cTn>
+                        </p:par>
+                      </p:childTnLst>
+                    </p:cTn>
+                  </p:par>
+                </p:childTnLst>
+              </p:cTn>
+              <p:prevCondLst>
+                <p:cond evt="onPrev" delay="0">
+                  <p:tgtEl>
+                    <p:sldTgt/>
+                  </p:tgtEl>
+                </p:cond>
+              </p:prevCondLst>
+              <p:nextCondLst>
+                <p:cond evt="onNext" delay="0">
+                  <p:tgtEl>
+                    <p:sldTgt/>
+                  </p:tgtEl>
+                </p:cond>
+              </p:nextCondLst>
+            </p:seq>
+          </p:childTnLst>
+        </p:cTn>
+      </p:par>
+    </p:tnLst>
+  </p:timing>
+</p:sld>
+</file>
+
+<file path=ppt/slides/slide7.xml><?xml version="1.0" encoding="utf-8"?>
+<p:sld xmlns:a="http://schemas.openxmlformats.org/drawingml/2006/main" xmlns:r="http://schemas.openxmlformats.org/officeDocument/2006/relationships" xmlns:p="http://schemas.openxmlformats.org/presentationml/2006/main">
+  <p:cSld>
+    <p:spTree>
+      <p:nvGrpSpPr>
+        <p:cNvPr id="1" name="">
+          <a:extLst>
+            <a:ext uri="{FF2B5EF4-FFF2-40B4-BE49-F238E27FC236}">
+              <a16:creationId xmlns:a16="http://schemas.microsoft.com/office/drawing/2014/main" id="{674BDEBB-5E1E-4034-5510-B30F2035E853}"/>
+            </a:ext>
+          </a:extLst>
+        </p:cNvPr>
+        <p:cNvGrpSpPr/>
+        <p:nvPr/>
+      </p:nvGrpSpPr>
+      <p:grpSpPr>
+        <a:xfrm>
+          <a:off x="0" y="0"/>
+          <a:ext cx="0" cy="0"/>
+          <a:chOff x="0" y="0"/>
+          <a:chExt cx="0" cy="0"/>
+        </a:xfrm>
+      </p:grpSpPr>
+      <p:cxnSp>
+        <p:nvCxnSpPr>
+          <p:cNvPr id="3" name="직선 연결선 2">
+            <a:extLst>
+              <a:ext uri="{FF2B5EF4-FFF2-40B4-BE49-F238E27FC236}">
+                <a16:creationId xmlns:a16="http://schemas.microsoft.com/office/drawing/2014/main" id="{548C4103-2895-5187-BCC0-EC8FDB846177}"/>
+              </a:ext>
+            </a:extLst>
+          </p:cNvPr>
+          <p:cNvCxnSpPr/>
+          <p:nvPr/>
+        </p:nvCxnSpPr>
+        <p:spPr>
+          <a:xfrm>
+            <a:off x="649224" y="1143000"/>
+            <a:ext cx="10981944" cy="0"/>
+          </a:xfrm>
+          <a:prstGeom prst="line">
+            <a:avLst/>
+          </a:prstGeom>
+          <a:ln>
+            <a:solidFill>
+              <a:schemeClr val="tx1"/>
+            </a:solidFill>
+          </a:ln>
+        </p:spPr>
+        <p:style>
+          <a:lnRef idx="2">
+            <a:schemeClr val="accent1"/>
+          </a:lnRef>
+          <a:fillRef idx="0">
+            <a:schemeClr val="accent1"/>
+          </a:fillRef>
+          <a:effectRef idx="1">
+            <a:schemeClr val="accent1"/>
+          </a:effectRef>
+          <a:fontRef idx="minor">
+            <a:schemeClr val="tx1"/>
+          </a:fontRef>
+        </p:style>
+      </p:cxnSp>
+      <p:sp>
+        <p:nvSpPr>
+          <p:cNvPr id="5" name="TextBox 4">
+            <a:extLst>
+              <a:ext uri="{FF2B5EF4-FFF2-40B4-BE49-F238E27FC236}">
+                <a16:creationId xmlns:a16="http://schemas.microsoft.com/office/drawing/2014/main" id="{6E164E1A-D183-BCB3-2FDB-A73FD56D7EAB}"/>
+              </a:ext>
+            </a:extLst>
+          </p:cNvPr>
+          <p:cNvSpPr txBox="1"/>
+          <p:nvPr/>
+        </p:nvSpPr>
+        <p:spPr>
+          <a:xfrm>
+            <a:off x="713232" y="374903"/>
+            <a:ext cx="2679192" cy="646331"/>
+          </a:xfrm>
+          <a:prstGeom prst="rect">
+            <a:avLst/>
+          </a:prstGeom>
+          <a:noFill/>
+        </p:spPr>
+        <p:txBody>
+          <a:bodyPr wrap="square" rtlCol="0">
+            <a:spAutoFit/>
+          </a:bodyPr>
+          <a:lstStyle/>
+          <a:p>
+            <a:r>
+              <a:rPr lang="ko-KR" altLang="en-US" sz="3600" dirty="0"/>
+              <a:t>마무리 멘트</a:t>
+            </a:r>
+          </a:p>
+        </p:txBody>
+      </p:sp>
+      <p:sp>
+        <p:nvSpPr>
+          <p:cNvPr id="2" name="Shape 0">
+            <a:extLst>
+              <a:ext uri="{FF2B5EF4-FFF2-40B4-BE49-F238E27FC236}">
+                <a16:creationId xmlns:a16="http://schemas.microsoft.com/office/drawing/2014/main" id="{DFA4C557-2350-E4B6-117C-5BFA61954331}"/>
+              </a:ext>
+            </a:extLst>
+          </p:cNvPr>
+          <p:cNvSpPr/>
+          <p:nvPr/>
+        </p:nvSpPr>
+        <p:spPr>
+          <a:xfrm>
+            <a:off x="0" y="0"/>
+            <a:ext cx="12192000" cy="1341120"/>
+          </a:xfrm>
+          <a:prstGeom prst="rect">
+            <a:avLst/>
+          </a:prstGeom>
+          <a:solidFill>
+            <a:srgbClr val="4A7C59"/>
+          </a:solidFill>
+          <a:ln/>
+        </p:spPr>
+        <p:txBody>
+          <a:bodyPr/>
+          <a:lstStyle/>
+          <a:p>
+            <a:endParaRPr lang="ko-KR" altLang="en-US" sz="2400"/>
+          </a:p>
+        </p:txBody>
+      </p:sp>
+      <p:sp>
+        <p:nvSpPr>
+          <p:cNvPr id="6" name="Text 1">
+            <a:extLst>
+              <a:ext uri="{FF2B5EF4-FFF2-40B4-BE49-F238E27FC236}">
+                <a16:creationId xmlns:a16="http://schemas.microsoft.com/office/drawing/2014/main" id="{A6E38469-FD03-D9C0-5BE8-AECD2A04FE2C}"/>
+              </a:ext>
+            </a:extLst>
+          </p:cNvPr>
+          <p:cNvSpPr/>
+          <p:nvPr/>
+        </p:nvSpPr>
+        <p:spPr>
+          <a:xfrm>
+            <a:off x="609600" y="219456"/>
+            <a:ext cx="10972800" cy="914400"/>
+          </a:xfrm>
+          <a:prstGeom prst="rect">
+            <a:avLst/>
+          </a:prstGeom>
+          <a:noFill/>
+          <a:ln/>
+        </p:spPr>
+        <p:txBody>
+          <a:bodyPr wrap="square" rtlCol="0" anchor="ctr"/>
+          <a:lstStyle/>
+          <a:p>
+            <a:r>
+              <a:rPr lang="en-US" altLang="ko-KR" sz="3467" b="1" dirty="0">
+                <a:solidFill>
+                  <a:srgbClr val="FFFFFF"/>
+                </a:solidFill>
+                <a:latin typeface="Malgun Gothic" pitchFamily="34" charset="0"/>
+                <a:ea typeface="Malgun Gothic" pitchFamily="34" charset="-122"/>
+              </a:rPr>
+              <a:t>SOF</a:t>
+            </a:r>
+            <a:endParaRPr lang="en-US" sz="3467" dirty="0"/>
+          </a:p>
+        </p:txBody>
+      </p:sp>
+      <p:sp>
+        <p:nvSpPr>
+          <p:cNvPr id="4" name="Shape 4">
+            <a:extLst>
+              <a:ext uri="{FF2B5EF4-FFF2-40B4-BE49-F238E27FC236}">
+                <a16:creationId xmlns:a16="http://schemas.microsoft.com/office/drawing/2014/main" id="{7D3A81DE-C76C-4752-1769-D15AB2192200}"/>
+              </a:ext>
+            </a:extLst>
+          </p:cNvPr>
+          <p:cNvSpPr/>
+          <p:nvPr/>
+        </p:nvSpPr>
+        <p:spPr>
+          <a:xfrm>
+            <a:off x="223868" y="1633086"/>
+            <a:ext cx="11832656" cy="5005458"/>
+          </a:xfrm>
+          <a:prstGeom prst="rect">
+            <a:avLst/>
+          </a:prstGeom>
+          <a:solidFill>
+            <a:srgbClr val="EAF2EF"/>
+          </a:solidFill>
+          <a:ln/>
+        </p:spPr>
+        <p:txBody>
+          <a:bodyPr/>
+          <a:lstStyle/>
+          <a:p>
+            <a:endParaRPr lang="ko-KR" altLang="en-US" sz="2400"/>
+          </a:p>
+        </p:txBody>
+      </p:sp>
+      <p:sp>
+        <p:nvSpPr>
+          <p:cNvPr id="7" name="말풍선: 모서리가 둥근 사각형 6">
+            <a:extLst>
+              <a:ext uri="{FF2B5EF4-FFF2-40B4-BE49-F238E27FC236}">
+                <a16:creationId xmlns:a16="http://schemas.microsoft.com/office/drawing/2014/main" id="{9196CD55-65E9-42E9-BEAF-4B62918484F0}"/>
+              </a:ext>
+            </a:extLst>
+          </p:cNvPr>
+          <p:cNvSpPr/>
+          <p:nvPr/>
+        </p:nvSpPr>
+        <p:spPr>
+          <a:xfrm>
+            <a:off x="3493008" y="1916310"/>
+            <a:ext cx="4315968" cy="2441448"/>
+          </a:xfrm>
+          <a:prstGeom prst="wedgeRoundRectCallout">
+            <a:avLst>
+              <a:gd name="adj1" fmla="val -44923"/>
+              <a:gd name="adj2" fmla="val 63782"/>
+              <a:gd name="adj3" fmla="val 16667"/>
+            </a:avLst>
+          </a:prstGeom>
+          <a:solidFill>
+            <a:schemeClr val="accent1">
+              <a:lumMod val="20000"/>
+              <a:lumOff val="80000"/>
+            </a:schemeClr>
+          </a:solidFill>
+        </p:spPr>
+        <p:style>
+          <a:lnRef idx="2">
+            <a:schemeClr val="accent1">
+              <a:shade val="15000"/>
+            </a:schemeClr>
+          </a:lnRef>
+          <a:fillRef idx="1">
+            <a:schemeClr val="accent1"/>
+          </a:fillRef>
+          <a:effectRef idx="0">
+            <a:schemeClr val="accent1"/>
+          </a:effectRef>
+          <a:fontRef idx="minor">
+            <a:schemeClr val="lt1"/>
+          </a:fontRef>
+        </p:style>
+        <p:txBody>
+          <a:bodyPr rtlCol="0" anchor="ctr"/>
+          <a:lstStyle/>
+          <a:p>
+            <a:pPr algn="ctr">
+              <a:lnSpc>
+                <a:spcPct val="150000"/>
+              </a:lnSpc>
+            </a:pPr>
+            <a:r>
+              <a:rPr lang="ko-KR" altLang="en-US" sz="2000" dirty="0">
+                <a:solidFill>
+                  <a:schemeClr val="tx1"/>
+                </a:solidFill>
+              </a:rPr>
+              <a:t>친구들 기 살려주고 싶었던 </a:t>
+            </a:r>
+            <a:endParaRPr lang="en-US" altLang="ko-KR" sz="2000" dirty="0">
+              <a:solidFill>
+                <a:schemeClr val="tx1"/>
+              </a:solidFill>
+            </a:endParaRPr>
+          </a:p>
+          <a:p>
+            <a:pPr algn="ctr">
+              <a:lnSpc>
+                <a:spcPct val="150000"/>
+              </a:lnSpc>
+            </a:pPr>
+            <a:r>
+              <a:rPr lang="ko-KR" altLang="en-US" sz="2000" dirty="0">
+                <a:solidFill>
+                  <a:schemeClr val="tx1"/>
+                </a:solidFill>
+              </a:rPr>
+              <a:t>그 마음이 어떤 건지는 이해가 가</a:t>
+            </a:r>
+            <a:r>
+              <a:rPr lang="en-US" altLang="ko-KR" sz="2000" dirty="0">
+                <a:solidFill>
+                  <a:schemeClr val="tx1"/>
+                </a:solidFill>
+              </a:rPr>
+              <a:t>. </a:t>
+            </a:r>
+            <a:r>
+              <a:rPr lang="ko-KR" altLang="en-US" sz="2000" dirty="0">
+                <a:solidFill>
+                  <a:schemeClr val="tx1"/>
+                </a:solidFill>
+              </a:rPr>
+              <a:t>자기가 그렇게 미안해하고</a:t>
+            </a:r>
+            <a:r>
+              <a:rPr lang="en-US" altLang="ko-KR" sz="2000" dirty="0">
+                <a:solidFill>
+                  <a:schemeClr val="tx1"/>
+                </a:solidFill>
+              </a:rPr>
+              <a:t>, </a:t>
+            </a:r>
+          </a:p>
+          <a:p>
+            <a:pPr algn="ctr">
+              <a:lnSpc>
+                <a:spcPct val="150000"/>
+              </a:lnSpc>
+            </a:pPr>
+            <a:r>
+              <a:rPr lang="ko-KR" altLang="en-US" sz="2000" dirty="0">
+                <a:solidFill>
+                  <a:schemeClr val="tx1"/>
+                </a:solidFill>
+              </a:rPr>
+              <a:t>왜 그랬는지 솔직하게 말해주니까 자기를 </a:t>
+            </a:r>
+            <a:r>
+              <a:rPr lang="ko-KR" altLang="en-US" sz="2000" dirty="0" err="1">
+                <a:solidFill>
+                  <a:schemeClr val="tx1"/>
+                </a:solidFill>
+              </a:rPr>
+              <a:t>용서할게</a:t>
+            </a:r>
+            <a:endParaRPr lang="ko-KR" altLang="en-US" sz="2000" dirty="0">
+              <a:solidFill>
+                <a:schemeClr val="tx1"/>
+              </a:solidFill>
+            </a:endParaRPr>
+          </a:p>
+        </p:txBody>
+      </p:sp>
+      <p:pic>
+        <p:nvPicPr>
+          <p:cNvPr id="19" name="그림 18">
+            <a:extLst>
+              <a:ext uri="{FF2B5EF4-FFF2-40B4-BE49-F238E27FC236}">
+                <a16:creationId xmlns:a16="http://schemas.microsoft.com/office/drawing/2014/main" id="{07073098-4682-2322-0FDA-1119C2888B38}"/>
+              </a:ext>
+            </a:extLst>
+          </p:cNvPr>
+          <p:cNvPicPr>
+            <a:picLocks noChangeAspect="1"/>
+          </p:cNvPicPr>
+          <p:nvPr/>
+        </p:nvPicPr>
+        <p:blipFill>
+          <a:blip r:embed="rId3">
+            <a:extLst>
+              <a:ext uri="{BEBA8EAE-BF5A-486C-A8C5-ECC9F3942E4B}">
+                <a14:imgProps xmlns:a14="http://schemas.microsoft.com/office/drawing/2010/main">
+                  <a14:imgLayer r:embed="rId4">
+                    <a14:imgEffect>
+                      <a14:backgroundRemoval t="520" b="97574" l="9961" r="99219">
+                        <a14:foregroundMark x1="38184" y1="11092" x2="40723" y2="693"/>
+                        <a14:foregroundMark x1="43750" y1="68631" x2="25098" y2="77816"/>
+                        <a14:foregroundMark x1="25098" y1="77816" x2="18359" y2="97574"/>
+                        <a14:foregroundMark x1="80762" y1="71750" x2="86426" y2="75043"/>
+                        <a14:foregroundMark x1="86426" y1="75043" x2="99219" y2="97054"/>
+                        <a14:foregroundMark x1="65723" y1="87695" x2="60352" y2="92374"/>
+                        <a14:foregroundMark x1="60352" y1="92374" x2="47266" y2="92721"/>
+                        <a14:foregroundMark x1="47266" y1="92721" x2="45996" y2="92028"/>
+                      </a14:backgroundRemoval>
+                    </a14:imgEffect>
+                  </a14:imgLayer>
+                </a14:imgProps>
+              </a:ext>
+            </a:extLst>
+          </a:blip>
+          <a:stretch>
+            <a:fillRect/>
+          </a:stretch>
+        </p:blipFill>
+        <p:spPr>
+          <a:xfrm>
+            <a:off x="6473175" y="3429000"/>
+            <a:ext cx="5363634" cy="3022282"/>
+          </a:xfrm>
+          <a:prstGeom prst="rect">
+            <a:avLst/>
+          </a:prstGeom>
+        </p:spPr>
+      </p:pic>
+      <p:pic>
+        <p:nvPicPr>
+          <p:cNvPr id="1028" name="Picture 4" descr="笑う女性のイラスト（5段階） | かわいいフリー素材集 いらすとや">
+            <a:extLst>
+              <a:ext uri="{FF2B5EF4-FFF2-40B4-BE49-F238E27FC236}">
+                <a16:creationId xmlns:a16="http://schemas.microsoft.com/office/drawing/2014/main" id="{C00CE250-2CFB-8D8C-E110-31CB0824274C}"/>
+              </a:ext>
+            </a:extLst>
+          </p:cNvPr>
+          <p:cNvPicPr>
+            <a:picLocks noChangeAspect="1" noChangeArrowheads="1"/>
+          </p:cNvPicPr>
+          <p:nvPr/>
+        </p:nvPicPr>
+        <p:blipFill>
+          <a:blip r:embed="rId5">
+            <a:extLst>
+              <a:ext uri="{28A0092B-C50C-407E-A947-70E740481C1C}">
+                <a14:useLocalDpi xmlns:a14="http://schemas.microsoft.com/office/drawing/2010/main" val="0"/>
+              </a:ext>
+            </a:extLst>
+          </a:blip>
+          <a:srcRect/>
+          <a:stretch>
+            <a:fillRect/>
+          </a:stretch>
+        </p:blipFill>
+        <p:spPr bwMode="auto">
+          <a:xfrm>
+            <a:off x="942030" y="3364992"/>
+            <a:ext cx="2121789" cy="2869362"/>
+          </a:xfrm>
+          <a:prstGeom prst="rect">
+            <a:avLst/>
+          </a:prstGeom>
+          <a:noFill/>
+          <a:extLst>
+            <a:ext uri="{909E8E84-426E-40DD-AFC4-6F175D3DCCD1}">
+              <a14:hiddenFill xmlns:a14="http://schemas.microsoft.com/office/drawing/2010/main">
+                <a:solidFill>
+                  <a:srgbClr val="FFFFFF"/>
+                </a:solidFill>
+              </a14:hiddenFill>
+            </a:ext>
+          </a:extLst>
+        </p:spPr>
+      </p:pic>
+    </p:spTree>
+    <p:extLst>
+      <p:ext uri="{BB962C8B-B14F-4D97-AF65-F5344CB8AC3E}">
+        <p14:creationId xmlns:p14="http://schemas.microsoft.com/office/powerpoint/2010/main" val="1112833488"/>
+      </p:ext>
+    </p:extLst>
+  </p:cSld>
+  <p:clrMapOvr>
+    <a:masterClrMapping/>
+  </p:clrMapOvr>
+</p:sld>
+</file>
+
+<file path=ppt/slides/slide8.xml><?xml version="1.0" encoding="utf-8"?>
+<p:sld xmlns:a="http://schemas.openxmlformats.org/drawingml/2006/main" xmlns:r="http://schemas.openxmlformats.org/officeDocument/2006/relationships" xmlns:p="http://schemas.openxmlformats.org/presentationml/2006/main">
+  <p:cSld>
+    <p:spTree>
+      <p:nvGrpSpPr>
         <p:cNvPr id="1" name=""/>
         <p:cNvGrpSpPr/>
         <p:nvPr/>
@@ -9553,7 +11983,7 @@
 </p:sld>
 </file>
 
-<file path=ppt/slides/slide7.xml><?xml version="1.0" encoding="utf-8"?>
+<file path=ppt/slides/slide9.xml><?xml version="1.0" encoding="utf-8"?>
 <p:sld xmlns:a="http://schemas.openxmlformats.org/drawingml/2006/main" xmlns:r="http://schemas.openxmlformats.org/officeDocument/2006/relationships" xmlns:p="http://schemas.openxmlformats.org/presentationml/2006/main">
   <p:cSld>
     <p:spTree>
@@ -9961,628 +12391,6 @@
     <p:extLst>
       <p:ext uri="{BB962C8B-B14F-4D97-AF65-F5344CB8AC3E}">
         <p14:creationId xmlns:p14="http://schemas.microsoft.com/office/powerpoint/2010/main" val="1229414363"/>
-      </p:ext>
-    </p:extLst>
-  </p:cSld>
-  <p:clrMapOvr>
-    <a:masterClrMapping/>
-  </p:clrMapOvr>
-</p:sld>
-</file>
-
-<file path=ppt/slides/slide8.xml><?xml version="1.0" encoding="utf-8"?>
-<p:sld xmlns:a="http://schemas.openxmlformats.org/drawingml/2006/main" xmlns:r="http://schemas.openxmlformats.org/officeDocument/2006/relationships" xmlns:p="http://schemas.openxmlformats.org/presentationml/2006/main">
-  <p:cSld>
-    <p:spTree>
-      <p:nvGrpSpPr>
-        <p:cNvPr id="1" name=""/>
-        <p:cNvGrpSpPr/>
-        <p:nvPr/>
-      </p:nvGrpSpPr>
-      <p:grpSpPr>
-        <a:xfrm>
-          <a:off x="0" y="0"/>
-          <a:ext cx="0" cy="0"/>
-          <a:chOff x="0" y="0"/>
-          <a:chExt cx="0" cy="0"/>
-        </a:xfrm>
-      </p:grpSpPr>
-      <p:sp>
-        <p:nvSpPr>
-          <p:cNvPr id="11" name="Shape 4">
-            <a:extLst>
-              <a:ext uri="{FF2B5EF4-FFF2-40B4-BE49-F238E27FC236}">
-                <a16:creationId xmlns:a16="http://schemas.microsoft.com/office/drawing/2014/main" id="{27AF0FFC-6FD2-CCA3-3B22-35DA38F786F4}"/>
-              </a:ext>
-            </a:extLst>
-          </p:cNvPr>
-          <p:cNvSpPr/>
-          <p:nvPr/>
-        </p:nvSpPr>
-        <p:spPr>
-          <a:xfrm>
-            <a:off x="4126028" y="1762706"/>
-            <a:ext cx="7645717" cy="4700979"/>
-          </a:xfrm>
-          <a:prstGeom prst="rect">
-            <a:avLst/>
-          </a:prstGeom>
-          <a:solidFill>
-            <a:srgbClr val="EAF2EF"/>
-          </a:solidFill>
-          <a:ln/>
-        </p:spPr>
-        <p:txBody>
-          <a:bodyPr/>
-          <a:lstStyle/>
-          <a:p>
-            <a:endParaRPr lang="ko-KR" altLang="en-US" sz="2400"/>
-          </a:p>
-        </p:txBody>
-      </p:sp>
-      <p:sp>
-        <p:nvSpPr>
-          <p:cNvPr id="5" name="Shape 0">
-            <a:extLst>
-              <a:ext uri="{FF2B5EF4-FFF2-40B4-BE49-F238E27FC236}">
-                <a16:creationId xmlns:a16="http://schemas.microsoft.com/office/drawing/2014/main" id="{4C706DBD-FF53-006A-3FE6-B91EB63417E0}"/>
-              </a:ext>
-            </a:extLst>
-          </p:cNvPr>
-          <p:cNvSpPr/>
-          <p:nvPr/>
-        </p:nvSpPr>
-        <p:spPr>
-          <a:xfrm>
-            <a:off x="0" y="0"/>
-            <a:ext cx="12192000" cy="1341120"/>
-          </a:xfrm>
-          <a:prstGeom prst="rect">
-            <a:avLst/>
-          </a:prstGeom>
-          <a:solidFill>
-            <a:srgbClr val="4A7C59"/>
-          </a:solidFill>
-          <a:ln/>
-        </p:spPr>
-        <p:txBody>
-          <a:bodyPr/>
-          <a:lstStyle/>
-          <a:p>
-            <a:endParaRPr lang="ko-KR" altLang="en-US" sz="2400"/>
-          </a:p>
-        </p:txBody>
-      </p:sp>
-      <p:sp>
-        <p:nvSpPr>
-          <p:cNvPr id="6" name="Text 1">
-            <a:extLst>
-              <a:ext uri="{FF2B5EF4-FFF2-40B4-BE49-F238E27FC236}">
-                <a16:creationId xmlns:a16="http://schemas.microsoft.com/office/drawing/2014/main" id="{5E750524-6E63-E923-850B-195BEDE9474A}"/>
-              </a:ext>
-            </a:extLst>
-          </p:cNvPr>
-          <p:cNvSpPr/>
-          <p:nvPr/>
-        </p:nvSpPr>
-        <p:spPr>
-          <a:xfrm>
-            <a:off x="609600" y="219456"/>
-            <a:ext cx="10972800" cy="914400"/>
-          </a:xfrm>
-          <a:prstGeom prst="rect">
-            <a:avLst/>
-          </a:prstGeom>
-          <a:noFill/>
-          <a:ln/>
-        </p:spPr>
-        <p:txBody>
-          <a:bodyPr wrap="square" rtlCol="0" anchor="ctr"/>
-          <a:lstStyle/>
-          <a:p>
-            <a:r>
-              <a:rPr lang="ko-KR" altLang="en-US" sz="3467" b="1" dirty="0">
-                <a:solidFill>
-                  <a:srgbClr val="FFFFFF"/>
-                </a:solidFill>
-                <a:latin typeface="Malgun Gothic" pitchFamily="34" charset="0"/>
-                <a:ea typeface="Malgun Gothic" pitchFamily="34" charset="-122"/>
-                <a:cs typeface="Malgun Gothic" pitchFamily="34" charset="-120"/>
-              </a:rPr>
-              <a:t>용서하는 방법</a:t>
-            </a:r>
-            <a:endParaRPr lang="en-US" sz="3467" dirty="0"/>
-          </a:p>
-        </p:txBody>
-      </p:sp>
-      <p:sp>
-        <p:nvSpPr>
-          <p:cNvPr id="9" name="TextBox 8">
-            <a:extLst>
-              <a:ext uri="{FF2B5EF4-FFF2-40B4-BE49-F238E27FC236}">
-                <a16:creationId xmlns:a16="http://schemas.microsoft.com/office/drawing/2014/main" id="{E23839D1-00BB-FA05-3884-0DC6733414E3}"/>
-              </a:ext>
-            </a:extLst>
-          </p:cNvPr>
-          <p:cNvSpPr txBox="1"/>
-          <p:nvPr/>
-        </p:nvSpPr>
-        <p:spPr>
-          <a:xfrm>
-            <a:off x="4367069" y="1762706"/>
-            <a:ext cx="7645718" cy="4210192"/>
-          </a:xfrm>
-          <a:prstGeom prst="rect">
-            <a:avLst/>
-          </a:prstGeom>
-          <a:noFill/>
-        </p:spPr>
-        <p:txBody>
-          <a:bodyPr wrap="square" rtlCol="0">
-            <a:spAutoFit/>
-          </a:bodyPr>
-          <a:lstStyle/>
-          <a:p>
-            <a:pPr marL="342900" indent="-342900">
-              <a:lnSpc>
-                <a:spcPct val="250000"/>
-              </a:lnSpc>
-              <a:buAutoNum type="arabicPeriod"/>
-            </a:pPr>
-            <a:r>
-              <a:rPr lang="ko-KR" altLang="en-US" sz="2800" dirty="0"/>
-              <a:t>침착하게 대응할 것</a:t>
-            </a:r>
-            <a:endParaRPr lang="en-US" altLang="ko-KR" sz="2800" dirty="0"/>
-          </a:p>
-          <a:p>
-            <a:pPr marL="342900" indent="-342900">
-              <a:lnSpc>
-                <a:spcPct val="250000"/>
-              </a:lnSpc>
-              <a:buAutoNum type="arabicPeriod"/>
-            </a:pPr>
-            <a:r>
-              <a:rPr lang="ko-KR" altLang="en-US" sz="2800" dirty="0"/>
-              <a:t>상대방이 왜 잘못을 저질렀는지 이해할 것</a:t>
-            </a:r>
-            <a:endParaRPr lang="en-US" altLang="ko-KR" sz="2800" dirty="0"/>
-          </a:p>
-          <a:p>
-            <a:pPr marL="342900" indent="-342900">
-              <a:lnSpc>
-                <a:spcPct val="250000"/>
-              </a:lnSpc>
-              <a:buAutoNum type="arabicPeriod"/>
-            </a:pPr>
-            <a:r>
-              <a:rPr lang="ko-KR" altLang="en-US" sz="2800" dirty="0"/>
-              <a:t>내가 받은 상처를 마주할 것</a:t>
-            </a:r>
-            <a:endParaRPr lang="en-US" altLang="ko-KR" sz="2800" dirty="0"/>
-          </a:p>
-          <a:p>
-            <a:pPr marL="342900" indent="-342900">
-              <a:lnSpc>
-                <a:spcPct val="250000"/>
-              </a:lnSpc>
-              <a:buAutoNum type="arabicPeriod"/>
-            </a:pPr>
-            <a:r>
-              <a:rPr lang="ko-KR" altLang="en-US" sz="2800" dirty="0"/>
-              <a:t>이 일에 대해서 잊을 것</a:t>
-            </a:r>
-            <a:endParaRPr lang="en-US" altLang="ko-KR" sz="2800" dirty="0"/>
-          </a:p>
-        </p:txBody>
-      </p:sp>
-      <p:pic>
-        <p:nvPicPr>
-          <p:cNvPr id="10" name="Picture 2" descr="너는 누구니: 빨간 옷 입은 외국 남자애가 아하! 하는 사진 : 네이버 블로그">
-            <a:extLst>
-              <a:ext uri="{FF2B5EF4-FFF2-40B4-BE49-F238E27FC236}">
-                <a16:creationId xmlns:a16="http://schemas.microsoft.com/office/drawing/2014/main" id="{E63B0DAC-927A-4237-38E4-BA339B18E67F}"/>
-              </a:ext>
-            </a:extLst>
-          </p:cNvPr>
-          <p:cNvPicPr>
-            <a:picLocks noChangeAspect="1" noChangeArrowheads="1"/>
-          </p:cNvPicPr>
-          <p:nvPr/>
-        </p:nvPicPr>
-        <p:blipFill>
-          <a:blip r:embed="rId3">
-            <a:extLst>
-              <a:ext uri="{BEBA8EAE-BF5A-486C-A8C5-ECC9F3942E4B}">
-                <a14:imgProps xmlns:a14="http://schemas.microsoft.com/office/drawing/2010/main">
-                  <a14:imgLayer r:embed="rId4">
-                    <a14:imgEffect>
-                      <a14:backgroundRemoval t="6489" b="99237" l="1563" r="99479">
-                        <a14:foregroundMark x1="32292" y1="9542" x2="56771" y2="4198"/>
-                        <a14:foregroundMark x1="56771" y1="4198" x2="75521" y2="9542"/>
-                        <a14:foregroundMark x1="75521" y1="9542" x2="76042" y2="11450"/>
-                        <a14:foregroundMark x1="36979" y1="6489" x2="55729" y2="763"/>
-                        <a14:foregroundMark x1="55729" y1="763" x2="68750" y2="6489"/>
-                        <a14:foregroundMark x1="68750" y1="6489" x2="69271" y2="6870"/>
-                        <a14:foregroundMark x1="26042" y1="40840" x2="521" y2="83206"/>
-                        <a14:foregroundMark x1="521" y1="83206" x2="2083" y2="95420"/>
-                        <a14:foregroundMark x1="2083" y1="95420" x2="5208" y2="99237"/>
-                        <a14:foregroundMark x1="40625" y1="51145" x2="32813" y2="53817"/>
-                        <a14:foregroundMark x1="68229" y1="51908" x2="85417" y2="56107"/>
-                        <a14:foregroundMark x1="85417" y1="56107" x2="99479" y2="65267"/>
-                        <a14:foregroundMark x1="46875" y1="43511" x2="55729" y2="44275"/>
-                      </a14:backgroundRemoval>
-                    </a14:imgEffect>
-                  </a14:imgLayer>
-                </a14:imgProps>
-              </a:ext>
-              <a:ext uri="{28A0092B-C50C-407E-A947-70E740481C1C}">
-                <a14:useLocalDpi xmlns:a14="http://schemas.microsoft.com/office/drawing/2010/main" val="0"/>
-              </a:ext>
-            </a:extLst>
-          </a:blip>
-          <a:srcRect/>
-          <a:stretch>
-            <a:fillRect/>
-          </a:stretch>
-        </p:blipFill>
-        <p:spPr bwMode="auto">
-          <a:xfrm>
-            <a:off x="609600" y="1854157"/>
-            <a:ext cx="3018314" cy="4118741"/>
-          </a:xfrm>
-          <a:prstGeom prst="rect">
-            <a:avLst/>
-          </a:prstGeom>
-          <a:noFill/>
-          <a:extLst>
-            <a:ext uri="{909E8E84-426E-40DD-AFC4-6F175D3DCCD1}">
-              <a14:hiddenFill xmlns:a14="http://schemas.microsoft.com/office/drawing/2010/main">
-                <a:solidFill>
-                  <a:srgbClr val="FFFFFF"/>
-                </a:solidFill>
-              </a14:hiddenFill>
-            </a:ext>
-          </a:extLst>
-        </p:spPr>
-      </p:pic>
-    </p:spTree>
-    <p:extLst>
-      <p:ext uri="{BB962C8B-B14F-4D97-AF65-F5344CB8AC3E}">
-        <p14:creationId xmlns:p14="http://schemas.microsoft.com/office/powerpoint/2010/main" val="2512427039"/>
-      </p:ext>
-    </p:extLst>
-  </p:cSld>
-  <p:clrMapOvr>
-    <a:masterClrMapping/>
-  </p:clrMapOvr>
-</p:sld>
-</file>
-
-<file path=ppt/slides/slide9.xml><?xml version="1.0" encoding="utf-8"?>
-<p:sld xmlns:a="http://schemas.openxmlformats.org/drawingml/2006/main" xmlns:r="http://schemas.openxmlformats.org/officeDocument/2006/relationships" xmlns:p="http://schemas.openxmlformats.org/presentationml/2006/main">
-  <p:cSld>
-    <p:spTree>
-      <p:nvGrpSpPr>
-        <p:cNvPr id="1" name="">
-          <a:extLst>
-            <a:ext uri="{FF2B5EF4-FFF2-40B4-BE49-F238E27FC236}">
-              <a16:creationId xmlns:a16="http://schemas.microsoft.com/office/drawing/2014/main" id="{A086AF62-E21C-BE96-4B18-5068A3AC9C2B}"/>
-            </a:ext>
-          </a:extLst>
-        </p:cNvPr>
-        <p:cNvGrpSpPr/>
-        <p:nvPr/>
-      </p:nvGrpSpPr>
-      <p:grpSpPr>
-        <a:xfrm>
-          <a:off x="0" y="0"/>
-          <a:ext cx="0" cy="0"/>
-          <a:chOff x="0" y="0"/>
-          <a:chExt cx="0" cy="0"/>
-        </a:xfrm>
-      </p:grpSpPr>
-      <p:sp>
-        <p:nvSpPr>
-          <p:cNvPr id="14" name="사각형: 둥근 모서리 13">
-            <a:extLst>
-              <a:ext uri="{FF2B5EF4-FFF2-40B4-BE49-F238E27FC236}">
-                <a16:creationId xmlns:a16="http://schemas.microsoft.com/office/drawing/2014/main" id="{424503DF-9404-BEDB-CB68-44E6DD35EB15}"/>
-              </a:ext>
-            </a:extLst>
-          </p:cNvPr>
-          <p:cNvSpPr/>
-          <p:nvPr/>
-        </p:nvSpPr>
-        <p:spPr>
-          <a:xfrm>
-            <a:off x="4562856" y="3310128"/>
-            <a:ext cx="7019544" cy="1341120"/>
-          </a:xfrm>
-          <a:prstGeom prst="roundRect">
-            <a:avLst/>
-          </a:prstGeom>
-          <a:solidFill>
-            <a:schemeClr val="accent6">
-              <a:lumMod val="20000"/>
-              <a:lumOff val="80000"/>
-            </a:schemeClr>
-          </a:solidFill>
-        </p:spPr>
-        <p:style>
-          <a:lnRef idx="2">
-            <a:schemeClr val="accent1">
-              <a:shade val="15000"/>
-            </a:schemeClr>
-          </a:lnRef>
-          <a:fillRef idx="1">
-            <a:schemeClr val="accent1"/>
-          </a:fillRef>
-          <a:effectRef idx="0">
-            <a:schemeClr val="accent1"/>
-          </a:effectRef>
-          <a:fontRef idx="minor">
-            <a:schemeClr val="lt1"/>
-          </a:fontRef>
-        </p:style>
-        <p:txBody>
-          <a:bodyPr rtlCol="0" anchor="ctr"/>
-          <a:lstStyle/>
-          <a:p>
-            <a:pPr algn="ctr"/>
-            <a:endParaRPr lang="ko-KR" altLang="en-US"/>
-          </a:p>
-        </p:txBody>
-      </p:sp>
-      <p:cxnSp>
-        <p:nvCxnSpPr>
-          <p:cNvPr id="3" name="직선 연결선 2">
-            <a:extLst>
-              <a:ext uri="{FF2B5EF4-FFF2-40B4-BE49-F238E27FC236}">
-                <a16:creationId xmlns:a16="http://schemas.microsoft.com/office/drawing/2014/main" id="{2907ED13-3081-D195-DDA7-5EF917F4C987}"/>
-              </a:ext>
-            </a:extLst>
-          </p:cNvPr>
-          <p:cNvCxnSpPr/>
-          <p:nvPr/>
-        </p:nvCxnSpPr>
-        <p:spPr>
-          <a:xfrm>
-            <a:off x="649224" y="1143000"/>
-            <a:ext cx="10981944" cy="0"/>
-          </a:xfrm>
-          <a:prstGeom prst="line">
-            <a:avLst/>
-          </a:prstGeom>
-          <a:ln>
-            <a:solidFill>
-              <a:schemeClr val="tx1"/>
-            </a:solidFill>
-          </a:ln>
-        </p:spPr>
-        <p:style>
-          <a:lnRef idx="2">
-            <a:schemeClr val="accent1"/>
-          </a:lnRef>
-          <a:fillRef idx="0">
-            <a:schemeClr val="accent1"/>
-          </a:fillRef>
-          <a:effectRef idx="1">
-            <a:schemeClr val="accent1"/>
-          </a:effectRef>
-          <a:fontRef idx="minor">
-            <a:schemeClr val="tx1"/>
-          </a:fontRef>
-        </p:style>
-      </p:cxnSp>
-      <p:sp>
-        <p:nvSpPr>
-          <p:cNvPr id="5" name="TextBox 4">
-            <a:extLst>
-              <a:ext uri="{FF2B5EF4-FFF2-40B4-BE49-F238E27FC236}">
-                <a16:creationId xmlns:a16="http://schemas.microsoft.com/office/drawing/2014/main" id="{F5D73DE8-DF1A-4D26-BFF5-185346A7E78A}"/>
-              </a:ext>
-            </a:extLst>
-          </p:cNvPr>
-          <p:cNvSpPr txBox="1"/>
-          <p:nvPr/>
-        </p:nvSpPr>
-        <p:spPr>
-          <a:xfrm>
-            <a:off x="713232" y="374903"/>
-            <a:ext cx="2679192" cy="646331"/>
-          </a:xfrm>
-          <a:prstGeom prst="rect">
-            <a:avLst/>
-          </a:prstGeom>
-          <a:noFill/>
-        </p:spPr>
-        <p:txBody>
-          <a:bodyPr wrap="square" rtlCol="0">
-            <a:spAutoFit/>
-          </a:bodyPr>
-          <a:lstStyle/>
-          <a:p>
-            <a:r>
-              <a:rPr lang="ko-KR" altLang="en-US" sz="3600" dirty="0"/>
-              <a:t>마무리 멘트</a:t>
-            </a:r>
-          </a:p>
-        </p:txBody>
-      </p:sp>
-      <p:sp>
-        <p:nvSpPr>
-          <p:cNvPr id="2" name="Shape 0">
-            <a:extLst>
-              <a:ext uri="{FF2B5EF4-FFF2-40B4-BE49-F238E27FC236}">
-                <a16:creationId xmlns:a16="http://schemas.microsoft.com/office/drawing/2014/main" id="{58D35909-E97C-099D-2736-3ACE62D216BD}"/>
-              </a:ext>
-            </a:extLst>
-          </p:cNvPr>
-          <p:cNvSpPr/>
-          <p:nvPr/>
-        </p:nvSpPr>
-        <p:spPr>
-          <a:xfrm>
-            <a:off x="0" y="0"/>
-            <a:ext cx="12192000" cy="1341120"/>
-          </a:xfrm>
-          <a:prstGeom prst="rect">
-            <a:avLst/>
-          </a:prstGeom>
-          <a:solidFill>
-            <a:srgbClr val="4A7C59"/>
-          </a:solidFill>
-          <a:ln/>
-        </p:spPr>
-        <p:txBody>
-          <a:bodyPr/>
-          <a:lstStyle/>
-          <a:p>
-            <a:endParaRPr lang="ko-KR" altLang="en-US" sz="2400"/>
-          </a:p>
-        </p:txBody>
-      </p:sp>
-      <p:sp>
-        <p:nvSpPr>
-          <p:cNvPr id="6" name="Text 1">
-            <a:extLst>
-              <a:ext uri="{FF2B5EF4-FFF2-40B4-BE49-F238E27FC236}">
-                <a16:creationId xmlns:a16="http://schemas.microsoft.com/office/drawing/2014/main" id="{C6D3BEF7-DAF2-BF8D-9F49-05037D8A7DE1}"/>
-              </a:ext>
-            </a:extLst>
-          </p:cNvPr>
-          <p:cNvSpPr/>
-          <p:nvPr/>
-        </p:nvSpPr>
-        <p:spPr>
-          <a:xfrm>
-            <a:off x="609600" y="219456"/>
-            <a:ext cx="10972800" cy="914400"/>
-          </a:xfrm>
-          <a:prstGeom prst="rect">
-            <a:avLst/>
-          </a:prstGeom>
-          <a:noFill/>
-          <a:ln/>
-        </p:spPr>
-        <p:txBody>
-          <a:bodyPr wrap="square" rtlCol="0" anchor="ctr"/>
-          <a:lstStyle/>
-          <a:p>
-            <a:r>
-              <a:rPr lang="ko-KR" altLang="en-US" sz="3467" b="1" dirty="0">
-                <a:solidFill>
-                  <a:srgbClr val="FFFFFF"/>
-                </a:solidFill>
-                <a:latin typeface="Malgun Gothic" pitchFamily="34" charset="0"/>
-                <a:ea typeface="Malgun Gothic" pitchFamily="34" charset="-122"/>
-              </a:rPr>
-              <a:t>마무리 멘트</a:t>
-            </a:r>
-            <a:endParaRPr lang="en-US" sz="3467" dirty="0"/>
-          </a:p>
-        </p:txBody>
-      </p:sp>
-      <p:pic>
-        <p:nvPicPr>
-          <p:cNvPr id="1026" name="Picture 2" descr="自助グループのイラスト（笑顔）">
-            <a:extLst>
-              <a:ext uri="{FF2B5EF4-FFF2-40B4-BE49-F238E27FC236}">
-                <a16:creationId xmlns:a16="http://schemas.microsoft.com/office/drawing/2014/main" id="{6571F1F4-6245-663C-4259-D22AE788CF84}"/>
-              </a:ext>
-            </a:extLst>
-          </p:cNvPr>
-          <p:cNvPicPr>
-            <a:picLocks noChangeAspect="1" noChangeArrowheads="1"/>
-          </p:cNvPicPr>
-          <p:nvPr/>
-        </p:nvPicPr>
-        <p:blipFill>
-          <a:blip r:embed="rId3">
-            <a:extLst>
-              <a:ext uri="{28A0092B-C50C-407E-A947-70E740481C1C}">
-                <a14:useLocalDpi xmlns:a14="http://schemas.microsoft.com/office/drawing/2010/main" val="0"/>
-              </a:ext>
-            </a:extLst>
-          </a:blip>
-          <a:srcRect/>
-          <a:stretch>
-            <a:fillRect/>
-          </a:stretch>
-        </p:blipFill>
-        <p:spPr bwMode="auto">
-          <a:xfrm>
-            <a:off x="466344" y="2276856"/>
-            <a:ext cx="3739896" cy="3739896"/>
-          </a:xfrm>
-          <a:prstGeom prst="rect">
-            <a:avLst/>
-          </a:prstGeom>
-          <a:noFill/>
-          <a:extLst>
-            <a:ext uri="{909E8E84-426E-40DD-AFC4-6F175D3DCCD1}">
-              <a14:hiddenFill xmlns:a14="http://schemas.microsoft.com/office/drawing/2010/main">
-                <a:solidFill>
-                  <a:srgbClr val="FFFFFF"/>
-                </a:solidFill>
-              </a14:hiddenFill>
-            </a:ext>
-          </a:extLst>
-        </p:spPr>
-      </p:pic>
-      <p:sp>
-        <p:nvSpPr>
-          <p:cNvPr id="4" name="TextBox 3">
-            <a:extLst>
-              <a:ext uri="{FF2B5EF4-FFF2-40B4-BE49-F238E27FC236}">
-                <a16:creationId xmlns:a16="http://schemas.microsoft.com/office/drawing/2014/main" id="{8355E158-EEE6-EA99-2B2D-CB4F7A7A901F}"/>
-              </a:ext>
-            </a:extLst>
-          </p:cNvPr>
-          <p:cNvSpPr txBox="1"/>
-          <p:nvPr/>
-        </p:nvSpPr>
-        <p:spPr>
-          <a:xfrm>
-            <a:off x="4636008" y="3429000"/>
-            <a:ext cx="7799832" cy="816955"/>
-          </a:xfrm>
-          <a:prstGeom prst="rect">
-            <a:avLst/>
-          </a:prstGeom>
-          <a:noFill/>
-        </p:spPr>
-        <p:txBody>
-          <a:bodyPr wrap="square" rtlCol="0">
-            <a:spAutoFit/>
-          </a:bodyPr>
-          <a:lstStyle/>
-          <a:p>
-            <a:pPr>
-              <a:lnSpc>
-                <a:spcPct val="200000"/>
-              </a:lnSpc>
-            </a:pPr>
-            <a:r>
-              <a:rPr lang="en-US" altLang="ko-KR" sz="2800" b="1" dirty="0"/>
-              <a:t>“</a:t>
-            </a:r>
-            <a:r>
-              <a:rPr lang="ko-KR" altLang="en-US" sz="2800" b="1" dirty="0"/>
-              <a:t>용서는 문제를 해결하는 가장 쉬운 방법</a:t>
-            </a:r>
-            <a:r>
-              <a:rPr lang="en-US" altLang="ko-KR" sz="2800" b="1" dirty="0"/>
-              <a:t>”</a:t>
-            </a:r>
-          </a:p>
-        </p:txBody>
-      </p:sp>
-    </p:spTree>
-    <p:extLst>
-      <p:ext uri="{BB962C8B-B14F-4D97-AF65-F5344CB8AC3E}">
-        <p14:creationId xmlns:p14="http://schemas.microsoft.com/office/powerpoint/2010/main" val="2512408432"/>
       </p:ext>
     </p:extLst>
   </p:cSld>

--- a/성격강점 기말 발표.pptx
+++ b/성격강점 기말 발표.pptx
@@ -10831,7 +10831,7 @@
         </p:nvGrpSpPr>
         <p:grpSpPr>
           <a:xfrm>
-            <a:off x="4139184" y="1871472"/>
+            <a:off x="4011168" y="1871472"/>
             <a:ext cx="7829730" cy="4399138"/>
             <a:chOff x="4139184" y="1871472"/>
             <a:chExt cx="7829730" cy="4399138"/>
